--- a/TutorBot_Entregable3_Presentacion.pptx
+++ b/TutorBot_Entregable3_Presentacion.pptx
@@ -11,15 +11,15 @@
     <p:sldId id="256" r:id="rId2"/>
     <p:sldId id="257" r:id="rId3"/>
     <p:sldId id="258" r:id="rId4"/>
-    <p:sldId id="259" r:id="rId5"/>
-    <p:sldId id="260" r:id="rId6"/>
-    <p:sldId id="261" r:id="rId7"/>
-    <p:sldId id="262" r:id="rId8"/>
-    <p:sldId id="263" r:id="rId9"/>
-    <p:sldId id="264" r:id="rId10"/>
-    <p:sldId id="265" r:id="rId11"/>
-    <p:sldId id="266" r:id="rId12"/>
-    <p:sldId id="267" r:id="rId13"/>
+    <p:sldId id="267" r:id="rId5"/>
+    <p:sldId id="259" r:id="rId6"/>
+    <p:sldId id="260" r:id="rId7"/>
+    <p:sldId id="261" r:id="rId8"/>
+    <p:sldId id="262" r:id="rId9"/>
+    <p:sldId id="263" r:id="rId10"/>
+    <p:sldId id="264" r:id="rId11"/>
+    <p:sldId id="265" r:id="rId12"/>
+    <p:sldId id="266" r:id="rId13"/>
     <p:sldId id="268" r:id="rId14"/>
     <p:sldId id="269" r:id="rId15"/>
   </p:sldIdLst>
@@ -2086,6 +2086,641 @@
 
 <file path=ppt/slides/slide10.xml><?xml version="1.0" encoding="utf-8"?>
 <p:sld xmlns:a="http://schemas.openxmlformats.org/drawingml/2006/main" xmlns:r="http://schemas.openxmlformats.org/officeDocument/2006/relationships" xmlns:p="http://schemas.openxmlformats.org/presentationml/2006/main">
+  <p:cSld name="Slide 9">
+    <p:bg>
+      <p:bgPr>
+        <a:solidFill>
+          <a:srgbClr val="F7F4EC"/>
+        </a:solidFill>
+        <a:effectLst/>
+      </p:bgPr>
+    </p:bg>
+    <p:spTree>
+      <p:nvGrpSpPr>
+        <p:cNvPr id="1" name=""/>
+        <p:cNvGrpSpPr/>
+        <p:nvPr/>
+      </p:nvGrpSpPr>
+      <p:grpSpPr>
+        <a:xfrm>
+          <a:off x="0" y="0"/>
+          <a:ext cx="0" cy="0"/>
+          <a:chOff x="0" y="0"/>
+          <a:chExt cx="0" cy="0"/>
+        </a:xfrm>
+      </p:grpSpPr>
+      <p:sp>
+        <p:nvSpPr>
+          <p:cNvPr id="2" name="Text 0"/>
+          <p:cNvSpPr/>
+          <p:nvPr/>
+        </p:nvSpPr>
+        <p:spPr>
+          <a:xfrm>
+            <a:off x="411480" y="210312"/>
+            <a:ext cx="6217920" cy="182880"/>
+          </a:xfrm>
+          <a:prstGeom prst="rect">
+            <a:avLst/>
+          </a:prstGeom>
+          <a:noFill/>
+          <a:ln/>
+        </p:spPr>
+        <p:txBody>
+          <a:bodyPr wrap="square" lIns="0" tIns="0" rIns="0" bIns="0" rtlCol="0" anchor="ctr"/>
+          <a:lstStyle/>
+          <a:p>
+            <a:pPr marL="0" indent="0">
+              <a:buNone/>
+            </a:pPr>
+            <a:r>
+              <a:rPr lang="en-US" sz="850" dirty="0">
+                <a:solidFill>
+                  <a:srgbClr val="5B6770"/>
+                </a:solidFill>
+              </a:rPr>
+              <a:t>Implementación y despliegue</a:t>
+            </a:r>
+            <a:endParaRPr lang="en-US" sz="850" dirty="0"/>
+          </a:p>
+        </p:txBody>
+      </p:sp>
+      <p:sp>
+        <p:nvSpPr>
+          <p:cNvPr id="3" name="Text 1"/>
+          <p:cNvSpPr/>
+          <p:nvPr/>
+        </p:nvSpPr>
+        <p:spPr>
+          <a:xfrm>
+            <a:off x="11155680" y="164592"/>
+            <a:ext cx="594360" cy="228600"/>
+          </a:xfrm>
+          <a:prstGeom prst="rect">
+            <a:avLst/>
+          </a:prstGeom>
+          <a:noFill/>
+          <a:ln/>
+        </p:spPr>
+        <p:txBody>
+          <a:bodyPr wrap="square" lIns="0" tIns="0" rIns="0" bIns="0" rtlCol="0" anchor="ctr"/>
+          <a:lstStyle/>
+          <a:p>
+            <a:pPr marL="0" indent="0" algn="r">
+              <a:buNone/>
+            </a:pPr>
+            <a:r>
+              <a:rPr lang="en-US" sz="900" dirty="0">
+                <a:solidFill>
+                  <a:srgbClr val="5B6770"/>
+                </a:solidFill>
+              </a:rPr>
+              <a:t>09</a:t>
+            </a:r>
+            <a:endParaRPr lang="en-US" sz="900" dirty="0"/>
+          </a:p>
+        </p:txBody>
+      </p:sp>
+      <p:sp>
+        <p:nvSpPr>
+          <p:cNvPr id="4" name="Shape 2"/>
+          <p:cNvSpPr/>
+          <p:nvPr/>
+        </p:nvSpPr>
+        <p:spPr>
+          <a:xfrm>
+            <a:off x="411480" y="475488"/>
+            <a:ext cx="11384280" cy="0"/>
+          </a:xfrm>
+          <a:prstGeom prst="line">
+            <a:avLst/>
+          </a:prstGeom>
+          <a:noFill/>
+          <a:ln w="8890">
+            <a:solidFill>
+              <a:srgbClr val="D6CAB4"/>
+            </a:solidFill>
+            <a:prstDash val="solid"/>
+          </a:ln>
+        </p:spPr>
+      </p:sp>
+      <p:sp>
+        <p:nvSpPr>
+          <p:cNvPr id="5" name="Text 3"/>
+          <p:cNvSpPr/>
+          <p:nvPr/>
+        </p:nvSpPr>
+        <p:spPr>
+          <a:xfrm>
+            <a:off x="594360" y="658368"/>
+            <a:ext cx="11155680" cy="502920"/>
+          </a:xfrm>
+          <a:prstGeom prst="rect">
+            <a:avLst/>
+          </a:prstGeom>
+          <a:noFill/>
+          <a:ln/>
+        </p:spPr>
+        <p:txBody>
+          <a:bodyPr wrap="square" rtlCol="0" anchor="ctr">
+            <a:normAutofit/>
+          </a:bodyPr>
+          <a:lstStyle/>
+          <a:p>
+            <a:pPr marL="0" indent="0">
+              <a:buNone/>
+            </a:pPr>
+            <a:r>
+              <a:rPr lang="en-US" sz="2700" b="1" dirty="0">
+                <a:solidFill>
+                  <a:srgbClr val="17202A"/>
+                </a:solidFill>
+                <a:latin typeface="Aptos Display" pitchFamily="34" charset="0"/>
+                <a:ea typeface="Aptos Display" pitchFamily="34" charset="-122"/>
+                <a:cs typeface="Aptos Display" pitchFamily="34" charset="-120"/>
+              </a:rPr>
+              <a:t>La aplicación está desplegada y operativa en Railway</a:t>
+            </a:r>
+            <a:endParaRPr lang="en-US" sz="2700" dirty="0"/>
+          </a:p>
+        </p:txBody>
+      </p:sp>
+      <p:sp>
+        <p:nvSpPr>
+          <p:cNvPr id="6" name="Text 4"/>
+          <p:cNvSpPr/>
+          <p:nvPr/>
+        </p:nvSpPr>
+        <p:spPr>
+          <a:xfrm>
+            <a:off x="594360" y="1298448"/>
+            <a:ext cx="5257800" cy="128016"/>
+          </a:xfrm>
+          <a:prstGeom prst="rect">
+            <a:avLst/>
+          </a:prstGeom>
+          <a:noFill/>
+          <a:ln/>
+        </p:spPr>
+        <p:txBody>
+          <a:bodyPr wrap="square" lIns="0" tIns="0" rIns="0" bIns="0" rtlCol="0" anchor="ctr">
+            <a:normAutofit/>
+          </a:bodyPr>
+          <a:lstStyle/>
+          <a:p>
+            <a:pPr marL="0" indent="0">
+              <a:buNone/>
+            </a:pPr>
+            <a:r>
+              <a:rPr lang="en-US" sz="980" dirty="0">
+                <a:solidFill>
+                  <a:srgbClr val="5B6770"/>
+                </a:solidFill>
+              </a:rPr>
+              <a:t>El runtime usa Docker, variables de entorno y una interfaz Gradio pública.</a:t>
+            </a:r>
+            <a:endParaRPr lang="en-US" sz="980" dirty="0"/>
+          </a:p>
+        </p:txBody>
+      </p:sp>
+      <p:pic>
+        <p:nvPicPr>
+          <p:cNvPr id="7" name="Image 0" descr="/mnt/data/7556199d-6e34-4b7b-b41c-1f2adcf3df76.png"/>
+          <p:cNvPicPr>
+            <a:picLocks noChangeAspect="1"/>
+          </p:cNvPicPr>
+          <p:nvPr/>
+        </p:nvPicPr>
+        <p:blipFill>
+          <a:blip r:embed="rId3"/>
+          <a:srcRect l="7082" r="7082"/>
+          <a:stretch/>
+        </p:blipFill>
+        <p:spPr>
+          <a:xfrm>
+            <a:off x="640080" y="1508760"/>
+            <a:ext cx="5303520" cy="2926080"/>
+          </a:xfrm>
+          <a:prstGeom prst="rect">
+            <a:avLst/>
+          </a:prstGeom>
+        </p:spPr>
+      </p:pic>
+      <p:pic>
+        <p:nvPicPr>
+          <p:cNvPr id="8" name="Image 1" descr="/mnt/data/2877a550-cce5-440f-b0cf-9295ab48f369.png"/>
+          <p:cNvPicPr>
+            <a:picLocks noChangeAspect="1"/>
+          </p:cNvPicPr>
+          <p:nvPr/>
+        </p:nvPicPr>
+        <p:blipFill>
+          <a:blip r:embed="rId4"/>
+          <a:srcRect t="18037" b="18037"/>
+          <a:stretch/>
+        </p:blipFill>
+        <p:spPr>
+          <a:xfrm>
+            <a:off x="640080" y="4480560"/>
+            <a:ext cx="5303520" cy="1572768"/>
+          </a:xfrm>
+          <a:prstGeom prst="rect">
+            <a:avLst/>
+          </a:prstGeom>
+        </p:spPr>
+      </p:pic>
+      <p:sp>
+        <p:nvSpPr>
+          <p:cNvPr id="9" name="Shape 5"/>
+          <p:cNvSpPr/>
+          <p:nvPr/>
+        </p:nvSpPr>
+        <p:spPr>
+          <a:xfrm>
+            <a:off x="6400800" y="1600200"/>
+            <a:ext cx="5166360" cy="2331720"/>
+          </a:xfrm>
+          <a:prstGeom prst="roundRect">
+            <a:avLst>
+              <a:gd name="adj" fmla="val 1961"/>
+            </a:avLst>
+          </a:prstGeom>
+          <a:solidFill>
+            <a:srgbClr val="111827"/>
+          </a:solidFill>
+          <a:ln w="7620">
+            <a:solidFill>
+              <a:srgbClr val="28313E"/>
+            </a:solidFill>
+            <a:prstDash val="solid"/>
+          </a:ln>
+        </p:spPr>
+      </p:sp>
+      <p:sp>
+        <p:nvSpPr>
+          <p:cNvPr id="10" name="Text 6"/>
+          <p:cNvSpPr/>
+          <p:nvPr/>
+        </p:nvSpPr>
+        <p:spPr>
+          <a:xfrm>
+            <a:off x="6510528" y="1691640"/>
+            <a:ext cx="4946904" cy="2148840"/>
+          </a:xfrm>
+          <a:prstGeom prst="rect">
+            <a:avLst/>
+          </a:prstGeom>
+          <a:noFill/>
+          <a:ln/>
+        </p:spPr>
+        <p:txBody>
+          <a:bodyPr wrap="square" lIns="0" tIns="0" rIns="0" bIns="0" rtlCol="0" anchor="ctr">
+            <a:normAutofit/>
+          </a:bodyPr>
+          <a:lstStyle/>
+          <a:p>
+            <a:pPr marL="0" indent="0">
+              <a:buNone/>
+            </a:pPr>
+            <a:r>
+              <a:rPr lang="en-US" sz="850" dirty="0">
+                <a:solidFill>
+                  <a:srgbClr val="E8EDF3"/>
+                </a:solidFill>
+                <a:latin typeface="Courier New" pitchFamily="34" charset="0"/>
+                <a:ea typeface="Courier New" pitchFamily="34" charset="-122"/>
+                <a:cs typeface="Courier New" pitchFamily="34" charset="-120"/>
+              </a:rPr>
+              <a:t>if __name__ == "__main__":</a:t>
+            </a:r>
+            <a:endParaRPr lang="en-US" sz="850" dirty="0"/>
+          </a:p>
+          <a:p>
+            <a:pPr marL="0" indent="0">
+              <a:buNone/>
+            </a:pPr>
+            <a:r>
+              <a:rPr lang="en-US" sz="850" dirty="0">
+                <a:solidFill>
+                  <a:srgbClr val="E8EDF3"/>
+                </a:solidFill>
+                <a:latin typeface="Courier New" pitchFamily="34" charset="0"/>
+                <a:ea typeface="Courier New" pitchFamily="34" charset="-122"/>
+                <a:cs typeface="Courier New" pitchFamily="34" charset="-120"/>
+              </a:rPr>
+              <a:t>    port = int(os.getenv("PORT", "7860"))</a:t>
+            </a:r>
+            <a:endParaRPr lang="en-US" sz="850" dirty="0"/>
+          </a:p>
+          <a:p>
+            <a:pPr marL="0" indent="0">
+              <a:buNone/>
+            </a:pPr>
+            <a:r>
+              <a:rPr lang="en-US" sz="850" dirty="0">
+                <a:solidFill>
+                  <a:srgbClr val="E8EDF3"/>
+                </a:solidFill>
+                <a:latin typeface="Courier New" pitchFamily="34" charset="0"/>
+                <a:ea typeface="Courier New" pitchFamily="34" charset="-122"/>
+                <a:cs typeface="Courier New" pitchFamily="34" charset="-120"/>
+              </a:rPr>
+              <a:t>    demo.queue()</a:t>
+            </a:r>
+            <a:endParaRPr lang="en-US" sz="850" dirty="0"/>
+          </a:p>
+          <a:p>
+            <a:pPr marL="0" indent="0">
+              <a:buNone/>
+            </a:pPr>
+            <a:r>
+              <a:rPr lang="en-US" sz="850" dirty="0">
+                <a:solidFill>
+                  <a:srgbClr val="E8EDF3"/>
+                </a:solidFill>
+                <a:latin typeface="Courier New" pitchFamily="34" charset="0"/>
+                <a:ea typeface="Courier New" pitchFamily="34" charset="-122"/>
+                <a:cs typeface="Courier New" pitchFamily="34" charset="-120"/>
+              </a:rPr>
+              <a:t>    demo.launch(</a:t>
+            </a:r>
+            <a:endParaRPr lang="en-US" sz="850" dirty="0"/>
+          </a:p>
+          <a:p>
+            <a:pPr marL="0" indent="0">
+              <a:buNone/>
+            </a:pPr>
+            <a:r>
+              <a:rPr lang="en-US" sz="850" dirty="0">
+                <a:solidFill>
+                  <a:srgbClr val="E8EDF3"/>
+                </a:solidFill>
+                <a:latin typeface="Courier New" pitchFamily="34" charset="0"/>
+                <a:ea typeface="Courier New" pitchFamily="34" charset="-122"/>
+                <a:cs typeface="Courier New" pitchFamily="34" charset="-120"/>
+              </a:rPr>
+              <a:t>        server_name="0.0.0.0",</a:t>
+            </a:r>
+            <a:endParaRPr lang="en-US" sz="850" dirty="0"/>
+          </a:p>
+          <a:p>
+            <a:pPr marL="0" indent="0">
+              <a:buNone/>
+            </a:pPr>
+            <a:r>
+              <a:rPr lang="en-US" sz="850" dirty="0">
+                <a:solidFill>
+                  <a:srgbClr val="E8EDF3"/>
+                </a:solidFill>
+                <a:latin typeface="Courier New" pitchFamily="34" charset="0"/>
+                <a:ea typeface="Courier New" pitchFamily="34" charset="-122"/>
+                <a:cs typeface="Courier New" pitchFamily="34" charset="-120"/>
+              </a:rPr>
+              <a:t>        server_port=port,</a:t>
+            </a:r>
+            <a:endParaRPr lang="en-US" sz="850" dirty="0"/>
+          </a:p>
+          <a:p>
+            <a:pPr marL="0" indent="0">
+              <a:buNone/>
+            </a:pPr>
+            <a:r>
+              <a:rPr lang="en-US" sz="850" dirty="0">
+                <a:solidFill>
+                  <a:srgbClr val="E8EDF3"/>
+                </a:solidFill>
+                <a:latin typeface="Courier New" pitchFamily="34" charset="0"/>
+                <a:ea typeface="Courier New" pitchFamily="34" charset="-122"/>
+                <a:cs typeface="Courier New" pitchFamily="34" charset="-120"/>
+              </a:rPr>
+              <a:t>        show_error=True</a:t>
+            </a:r>
+            <a:endParaRPr lang="en-US" sz="850" dirty="0"/>
+          </a:p>
+          <a:p>
+            <a:pPr marL="0" indent="0">
+              <a:buNone/>
+            </a:pPr>
+            <a:r>
+              <a:rPr lang="en-US" sz="850" dirty="0">
+                <a:solidFill>
+                  <a:srgbClr val="E8EDF3"/>
+                </a:solidFill>
+                <a:latin typeface="Courier New" pitchFamily="34" charset="0"/>
+                <a:ea typeface="Courier New" pitchFamily="34" charset="-122"/>
+                <a:cs typeface="Courier New" pitchFamily="34" charset="-120"/>
+              </a:rPr>
+              <a:t>    )</a:t>
+            </a:r>
+            <a:endParaRPr lang="en-US" sz="850" dirty="0"/>
+          </a:p>
+        </p:txBody>
+      </p:sp>
+      <p:sp>
+        <p:nvSpPr>
+          <p:cNvPr id="11" name="Shape 7"/>
+          <p:cNvSpPr/>
+          <p:nvPr/>
+        </p:nvSpPr>
+        <p:spPr>
+          <a:xfrm>
+            <a:off x="6400800" y="4206240"/>
+            <a:ext cx="5166360" cy="1554480"/>
+          </a:xfrm>
+          <a:prstGeom prst="roundRect">
+            <a:avLst>
+              <a:gd name="adj" fmla="val 2941"/>
+            </a:avLst>
+          </a:prstGeom>
+          <a:solidFill>
+            <a:srgbClr val="111827"/>
+          </a:solidFill>
+          <a:ln w="7620">
+            <a:solidFill>
+              <a:srgbClr val="28313E"/>
+            </a:solidFill>
+            <a:prstDash val="solid"/>
+          </a:ln>
+        </p:spPr>
+      </p:sp>
+      <p:sp>
+        <p:nvSpPr>
+          <p:cNvPr id="12" name="Text 8"/>
+          <p:cNvSpPr/>
+          <p:nvPr/>
+        </p:nvSpPr>
+        <p:spPr>
+          <a:xfrm>
+            <a:off x="6510528" y="4297680"/>
+            <a:ext cx="4946904" cy="1371600"/>
+          </a:xfrm>
+          <a:prstGeom prst="rect">
+            <a:avLst/>
+          </a:prstGeom>
+          <a:noFill/>
+          <a:ln/>
+        </p:spPr>
+        <p:txBody>
+          <a:bodyPr wrap="square" lIns="0" tIns="0" rIns="0" bIns="0" rtlCol="0" anchor="ctr">
+            <a:normAutofit/>
+          </a:bodyPr>
+          <a:lstStyle/>
+          <a:p>
+            <a:pPr marL="0" indent="0">
+              <a:buNone/>
+            </a:pPr>
+            <a:r>
+              <a:rPr lang="en-US" sz="940" dirty="0">
+                <a:solidFill>
+                  <a:srgbClr val="E8EDF3"/>
+                </a:solidFill>
+                <a:latin typeface="Courier New" pitchFamily="34" charset="0"/>
+                <a:ea typeface="Courier New" pitchFamily="34" charset="-122"/>
+                <a:cs typeface="Courier New" pitchFamily="34" charset="-120"/>
+              </a:rPr>
+              <a:t># railway.json</a:t>
+            </a:r>
+            <a:endParaRPr lang="en-US" sz="940" dirty="0"/>
+          </a:p>
+          <a:p>
+            <a:pPr marL="0" indent="0">
+              <a:buNone/>
+            </a:pPr>
+            <a:r>
+              <a:rPr lang="en-US" sz="940" dirty="0">
+                <a:solidFill>
+                  <a:srgbClr val="E8EDF3"/>
+                </a:solidFill>
+                <a:latin typeface="Courier New" pitchFamily="34" charset="0"/>
+                <a:ea typeface="Courier New" pitchFamily="34" charset="-122"/>
+                <a:cs typeface="Courier New" pitchFamily="34" charset="-120"/>
+              </a:rPr>
+              <a:t>{</a:t>
+            </a:r>
+            <a:endParaRPr lang="en-US" sz="940" dirty="0"/>
+          </a:p>
+          <a:p>
+            <a:pPr marL="0" indent="0">
+              <a:buNone/>
+            </a:pPr>
+            <a:r>
+              <a:rPr lang="en-US" sz="940" dirty="0">
+                <a:solidFill>
+                  <a:srgbClr val="E8EDF3"/>
+                </a:solidFill>
+                <a:latin typeface="Courier New" pitchFamily="34" charset="0"/>
+                <a:ea typeface="Courier New" pitchFamily="34" charset="-122"/>
+                <a:cs typeface="Courier New" pitchFamily="34" charset="-120"/>
+              </a:rPr>
+              <a:t>  "build": { "builder": "DOCKERFILE" }</a:t>
+            </a:r>
+            <a:endParaRPr lang="en-US" sz="940" dirty="0"/>
+          </a:p>
+          <a:p>
+            <a:pPr marL="0" indent="0">
+              <a:buNone/>
+            </a:pPr>
+            <a:r>
+              <a:rPr lang="en-US" sz="940" dirty="0">
+                <a:solidFill>
+                  <a:srgbClr val="E8EDF3"/>
+                </a:solidFill>
+                <a:latin typeface="Courier New" pitchFamily="34" charset="0"/>
+                <a:ea typeface="Courier New" pitchFamily="34" charset="-122"/>
+                <a:cs typeface="Courier New" pitchFamily="34" charset="-120"/>
+              </a:rPr>
+              <a:t>}</a:t>
+            </a:r>
+            <a:endParaRPr lang="en-US" sz="940" dirty="0"/>
+          </a:p>
+          <a:p>
+            <a:pPr marL="0" indent="0">
+              <a:buNone/>
+            </a:pPr>
+            <a:endParaRPr lang="en-US" sz="940" dirty="0"/>
+          </a:p>
+          <a:p>
+            <a:pPr marL="0" indent="0">
+              <a:buNone/>
+            </a:pPr>
+            <a:r>
+              <a:rPr lang="en-US" sz="940" dirty="0">
+                <a:solidFill>
+                  <a:srgbClr val="E8EDF3"/>
+                </a:solidFill>
+                <a:latin typeface="Courier New" pitchFamily="34" charset="0"/>
+                <a:ea typeface="Courier New" pitchFamily="34" charset="-122"/>
+                <a:cs typeface="Courier New" pitchFamily="34" charset="-120"/>
+              </a:rPr>
+              <a:t>GEMINI_API_KEY = Railway Variable</a:t>
+            </a:r>
+            <a:endParaRPr lang="en-US" sz="940" dirty="0"/>
+          </a:p>
+          <a:p>
+            <a:pPr marL="0" indent="0">
+              <a:buNone/>
+            </a:pPr>
+            <a:r>
+              <a:rPr lang="en-US" sz="940" dirty="0">
+                <a:solidFill>
+                  <a:srgbClr val="E8EDF3"/>
+                </a:solidFill>
+                <a:latin typeface="Courier New" pitchFamily="34" charset="0"/>
+                <a:ea typeface="Courier New" pitchFamily="34" charset="-122"/>
+                <a:cs typeface="Courier New" pitchFamily="34" charset="-120"/>
+              </a:rPr>
+              <a:t>HF_TOKEN = Railway Variable</a:t>
+            </a:r>
+            <a:endParaRPr lang="en-US" sz="940" dirty="0"/>
+          </a:p>
+        </p:txBody>
+      </p:sp>
+      <p:sp>
+        <p:nvSpPr>
+          <p:cNvPr id="13" name="Text 9"/>
+          <p:cNvSpPr/>
+          <p:nvPr/>
+        </p:nvSpPr>
+        <p:spPr>
+          <a:xfrm>
+            <a:off x="594360" y="6565392"/>
+            <a:ext cx="7315200" cy="182880"/>
+          </a:xfrm>
+          <a:prstGeom prst="rect">
+            <a:avLst/>
+          </a:prstGeom>
+          <a:noFill/>
+          <a:ln/>
+        </p:spPr>
+        <p:txBody>
+          <a:bodyPr wrap="square" lIns="0" tIns="0" rIns="0" bIns="0" rtlCol="0" anchor="ctr"/>
+          <a:lstStyle/>
+          <a:p>
+            <a:pPr marL="0" indent="0">
+              <a:buNone/>
+            </a:pPr>
+            <a:r>
+              <a:rPr lang="en-US" sz="770" dirty="0">
+                <a:solidFill>
+                  <a:srgbClr val="8B8275"/>
+                </a:solidFill>
+              </a:rPr>
+              <a:t>TutorBot · Entregable 3</a:t>
+            </a:r>
+            <a:endParaRPr lang="en-US" sz="770" dirty="0"/>
+          </a:p>
+        </p:txBody>
+      </p:sp>
+    </p:spTree>
+  </p:cSld>
+  <p:clrMapOvr>
+    <a:masterClrMapping/>
+  </p:clrMapOvr>
+</p:sld>
+</file>
+
+<file path=ppt/slides/slide11.xml><?xml version="1.0" encoding="utf-8"?>
+<p:sld xmlns:a="http://schemas.openxmlformats.org/drawingml/2006/main" xmlns:r="http://schemas.openxmlformats.org/officeDocument/2006/relationships" xmlns:p="http://schemas.openxmlformats.org/presentationml/2006/main">
   <p:cSld name="Slide 10">
     <p:bg>
       <p:bgPr>
@@ -2991,7 +3626,7 @@
 </p:sld>
 </file>
 
-<file path=ppt/slides/slide11.xml><?xml version="1.0" encoding="utf-8"?>
+<file path=ppt/slides/slide12.xml><?xml version="1.0" encoding="utf-8"?>
 <p:sld xmlns:a="http://schemas.openxmlformats.org/drawingml/2006/main" xmlns:r="http://schemas.openxmlformats.org/officeDocument/2006/relationships" xmlns:p="http://schemas.openxmlformats.org/presentationml/2006/main">
   <p:cSld name="Slide 11">
     <p:bg>
@@ -5309,1047 +5944,6 @@
       <p:sp>
         <p:nvSpPr>
           <p:cNvPr id="64" name="Text 62"/>
-          <p:cNvSpPr/>
-          <p:nvPr/>
-        </p:nvSpPr>
-        <p:spPr>
-          <a:xfrm>
-            <a:off x="594360" y="6565392"/>
-            <a:ext cx="7315200" cy="182880"/>
-          </a:xfrm>
-          <a:prstGeom prst="rect">
-            <a:avLst/>
-          </a:prstGeom>
-          <a:noFill/>
-          <a:ln/>
-        </p:spPr>
-        <p:txBody>
-          <a:bodyPr wrap="square" lIns="0" tIns="0" rIns="0" bIns="0" rtlCol="0" anchor="ctr"/>
-          <a:lstStyle/>
-          <a:p>
-            <a:pPr marL="0" indent="0">
-              <a:buNone/>
-            </a:pPr>
-            <a:r>
-              <a:rPr lang="en-US" sz="770" dirty="0">
-                <a:solidFill>
-                  <a:srgbClr val="8B8275"/>
-                </a:solidFill>
-              </a:rPr>
-              <a:t>TutorBot · Entregable 3</a:t>
-            </a:r>
-            <a:endParaRPr lang="en-US" sz="770" dirty="0"/>
-          </a:p>
-        </p:txBody>
-      </p:sp>
-    </p:spTree>
-  </p:cSld>
-  <p:clrMapOvr>
-    <a:masterClrMapping/>
-  </p:clrMapOvr>
-</p:sld>
-</file>
-
-<file path=ppt/slides/slide12.xml><?xml version="1.0" encoding="utf-8"?>
-<p:sld xmlns:a="http://schemas.openxmlformats.org/drawingml/2006/main" xmlns:r="http://schemas.openxmlformats.org/officeDocument/2006/relationships" xmlns:p="http://schemas.openxmlformats.org/presentationml/2006/main">
-  <p:cSld name="Slide 12">
-    <p:bg>
-      <p:bgPr>
-        <a:solidFill>
-          <a:srgbClr val="F7F4EC"/>
-        </a:solidFill>
-        <a:effectLst/>
-      </p:bgPr>
-    </p:bg>
-    <p:spTree>
-      <p:nvGrpSpPr>
-        <p:cNvPr id="1" name=""/>
-        <p:cNvGrpSpPr/>
-        <p:nvPr/>
-      </p:nvGrpSpPr>
-      <p:grpSpPr>
-        <a:xfrm>
-          <a:off x="0" y="0"/>
-          <a:ext cx="0" cy="0"/>
-          <a:chOff x="0" y="0"/>
-          <a:chExt cx="0" cy="0"/>
-        </a:xfrm>
-      </p:grpSpPr>
-      <p:sp>
-        <p:nvSpPr>
-          <p:cNvPr id="2" name="Text 0"/>
-          <p:cNvSpPr/>
-          <p:nvPr/>
-        </p:nvSpPr>
-        <p:spPr>
-          <a:xfrm>
-            <a:off x="411480" y="210312"/>
-            <a:ext cx="6217920" cy="182880"/>
-          </a:xfrm>
-          <a:prstGeom prst="rect">
-            <a:avLst/>
-          </a:prstGeom>
-          <a:noFill/>
-          <a:ln/>
-        </p:spPr>
-        <p:txBody>
-          <a:bodyPr wrap="square" lIns="0" tIns="0" rIns="0" bIns="0" rtlCol="0" anchor="ctr"/>
-          <a:lstStyle/>
-          <a:p>
-            <a:pPr marL="0" indent="0">
-              <a:buNone/>
-            </a:pPr>
-            <a:r>
-              <a:rPr lang="en-US" sz="850" dirty="0">
-                <a:solidFill>
-                  <a:srgbClr val="5B6770"/>
-                </a:solidFill>
-              </a:rPr>
-              <a:t>Diseño de evaluación</a:t>
-            </a:r>
-            <a:endParaRPr lang="en-US" sz="850" dirty="0"/>
-          </a:p>
-        </p:txBody>
-      </p:sp>
-      <p:sp>
-        <p:nvSpPr>
-          <p:cNvPr id="3" name="Text 1"/>
-          <p:cNvSpPr/>
-          <p:nvPr/>
-        </p:nvSpPr>
-        <p:spPr>
-          <a:xfrm>
-            <a:off x="11155680" y="164592"/>
-            <a:ext cx="594360" cy="228600"/>
-          </a:xfrm>
-          <a:prstGeom prst="rect">
-            <a:avLst/>
-          </a:prstGeom>
-          <a:noFill/>
-          <a:ln/>
-        </p:spPr>
-        <p:txBody>
-          <a:bodyPr wrap="square" lIns="0" tIns="0" rIns="0" bIns="0" rtlCol="0" anchor="ctr"/>
-          <a:lstStyle/>
-          <a:p>
-            <a:pPr marL="0" indent="0" algn="r">
-              <a:buNone/>
-            </a:pPr>
-            <a:r>
-              <a:rPr lang="en-US" sz="900" dirty="0">
-                <a:solidFill>
-                  <a:srgbClr val="5B6770"/>
-                </a:solidFill>
-              </a:rPr>
-              <a:t>12</a:t>
-            </a:r>
-            <a:endParaRPr lang="en-US" sz="900" dirty="0"/>
-          </a:p>
-        </p:txBody>
-      </p:sp>
-      <p:sp>
-        <p:nvSpPr>
-          <p:cNvPr id="4" name="Shape 2"/>
-          <p:cNvSpPr/>
-          <p:nvPr/>
-        </p:nvSpPr>
-        <p:spPr>
-          <a:xfrm>
-            <a:off x="411480" y="475488"/>
-            <a:ext cx="11384280" cy="0"/>
-          </a:xfrm>
-          <a:prstGeom prst="line">
-            <a:avLst/>
-          </a:prstGeom>
-          <a:noFill/>
-          <a:ln w="8890">
-            <a:solidFill>
-              <a:srgbClr val="D6CAB4"/>
-            </a:solidFill>
-            <a:prstDash val="solid"/>
-          </a:ln>
-        </p:spPr>
-      </p:sp>
-      <p:sp>
-        <p:nvSpPr>
-          <p:cNvPr id="5" name="Text 3"/>
-          <p:cNvSpPr/>
-          <p:nvPr/>
-        </p:nvSpPr>
-        <p:spPr>
-          <a:xfrm>
-            <a:off x="594360" y="658368"/>
-            <a:ext cx="5577840" cy="502920"/>
-          </a:xfrm>
-          <a:prstGeom prst="rect">
-            <a:avLst/>
-          </a:prstGeom>
-          <a:noFill/>
-          <a:ln/>
-        </p:spPr>
-        <p:txBody>
-          <a:bodyPr wrap="square" rtlCol="0" anchor="ctr">
-            <a:normAutofit/>
-          </a:bodyPr>
-          <a:lstStyle/>
-          <a:p>
-            <a:pPr marL="0" indent="0">
-              <a:buNone/>
-            </a:pPr>
-            <a:r>
-              <a:rPr lang="en-US" sz="2700" b="1" dirty="0">
-                <a:solidFill>
-                  <a:srgbClr val="17202A"/>
-                </a:solidFill>
-                <a:latin typeface="Aptos Display" pitchFamily="34" charset="0"/>
-                <a:ea typeface="Aptos Display" pitchFamily="34" charset="-122"/>
-                <a:cs typeface="Aptos Display" pitchFamily="34" charset="-120"/>
-              </a:rPr>
-              <a:t>El conjunto de validación prueba 9 cursos y 5 conductas</a:t>
-            </a:r>
-            <a:endParaRPr lang="en-US" sz="2700" dirty="0"/>
-          </a:p>
-        </p:txBody>
-      </p:sp>
-      <p:sp>
-        <p:nvSpPr>
-          <p:cNvPr id="6" name="Text 4"/>
-          <p:cNvSpPr/>
-          <p:nvPr/>
-        </p:nvSpPr>
-        <p:spPr>
-          <a:xfrm>
-            <a:off x="594360" y="1298448"/>
-            <a:ext cx="5257800" cy="128016"/>
-          </a:xfrm>
-          <a:prstGeom prst="rect">
-            <a:avLst/>
-          </a:prstGeom>
-          <a:noFill/>
-          <a:ln/>
-        </p:spPr>
-        <p:txBody>
-          <a:bodyPr wrap="square" lIns="0" tIns="0" rIns="0" bIns="0" rtlCol="0" anchor="ctr">
-            <a:normAutofit/>
-          </a:bodyPr>
-          <a:lstStyle/>
-          <a:p>
-            <a:pPr marL="0" indent="0">
-              <a:buNone/>
-            </a:pPr>
-            <a:r>
-              <a:rPr lang="en-US" sz="980" dirty="0">
-                <a:solidFill>
-                  <a:srgbClr val="5B6770"/>
-                </a:solidFill>
-              </a:rPr>
-              <a:t>Cada curso aporta una pregunta conceptual, una de código y una guía de tarea.</a:t>
-            </a:r>
-            <a:endParaRPr lang="en-US" sz="980" dirty="0"/>
-          </a:p>
-        </p:txBody>
-      </p:sp>
-      <p:sp>
-        <p:nvSpPr>
-          <p:cNvPr id="7" name="Text 5"/>
-          <p:cNvSpPr/>
-          <p:nvPr/>
-        </p:nvSpPr>
-        <p:spPr>
-          <a:xfrm>
-            <a:off x="731520" y="1600200"/>
-            <a:ext cx="3383280" cy="228600"/>
-          </a:xfrm>
-          <a:prstGeom prst="rect">
-            <a:avLst/>
-          </a:prstGeom>
-          <a:noFill/>
-          <a:ln/>
-        </p:spPr>
-        <p:txBody>
-          <a:bodyPr wrap="square" lIns="0" tIns="0" rIns="0" bIns="0" rtlCol="0" anchor="ctr"/>
-          <a:lstStyle/>
-          <a:p>
-            <a:pPr marL="0" indent="0">
-              <a:buNone/>
-            </a:pPr>
-            <a:r>
-              <a:rPr lang="en-US" sz="1500" b="1" dirty="0">
-                <a:solidFill>
-                  <a:srgbClr val="F97316"/>
-                </a:solidFill>
-              </a:rPr>
-              <a:t>Ciclo 1</a:t>
-            </a:r>
-            <a:endParaRPr lang="en-US" sz="1500" dirty="0"/>
-          </a:p>
-        </p:txBody>
-      </p:sp>
-      <p:sp>
-        <p:nvSpPr>
-          <p:cNvPr id="8" name="Text 6"/>
-          <p:cNvSpPr/>
-          <p:nvPr/>
-        </p:nvSpPr>
-        <p:spPr>
-          <a:xfrm>
-            <a:off x="731520" y="1938528"/>
-            <a:ext cx="3429000" cy="411480"/>
-          </a:xfrm>
-          <a:prstGeom prst="rect">
-            <a:avLst/>
-          </a:prstGeom>
-          <a:noFill/>
-          <a:ln/>
-        </p:spPr>
-        <p:txBody>
-          <a:bodyPr wrap="square" lIns="0" tIns="0" rIns="0" bIns="0" rtlCol="0" anchor="ctr">
-            <a:normAutofit/>
-          </a:bodyPr>
-          <a:lstStyle/>
-          <a:p>
-            <a:pPr marL="0" indent="0">
-              <a:buNone/>
-            </a:pPr>
-            <a:r>
-              <a:rPr lang="en-US" sz="1120" dirty="0">
-                <a:solidFill>
-                  <a:srgbClr val="17202A"/>
-                </a:solidFill>
-              </a:rPr>
-              <a:t>ML · Python · Visualización</a:t>
-            </a:r>
-            <a:endParaRPr lang="en-US" sz="1120" dirty="0"/>
-          </a:p>
-        </p:txBody>
-      </p:sp>
-      <p:sp>
-        <p:nvSpPr>
-          <p:cNvPr id="9" name="Text 7"/>
-          <p:cNvSpPr/>
-          <p:nvPr/>
-        </p:nvSpPr>
-        <p:spPr>
-          <a:xfrm>
-            <a:off x="4480560" y="1600200"/>
-            <a:ext cx="3383280" cy="228600"/>
-          </a:xfrm>
-          <a:prstGeom prst="rect">
-            <a:avLst/>
-          </a:prstGeom>
-          <a:noFill/>
-          <a:ln/>
-        </p:spPr>
-        <p:txBody>
-          <a:bodyPr wrap="square" lIns="0" tIns="0" rIns="0" bIns="0" rtlCol="0" anchor="ctr"/>
-          <a:lstStyle/>
-          <a:p>
-            <a:pPr marL="0" indent="0">
-              <a:buNone/>
-            </a:pPr>
-            <a:r>
-              <a:rPr lang="en-US" sz="1500" b="1" dirty="0">
-                <a:solidFill>
-                  <a:srgbClr val="16825D"/>
-                </a:solidFill>
-              </a:rPr>
-              <a:t>Ciclo 2</a:t>
-            </a:r>
-            <a:endParaRPr lang="en-US" sz="1500" dirty="0"/>
-          </a:p>
-        </p:txBody>
-      </p:sp>
-      <p:sp>
-        <p:nvSpPr>
-          <p:cNvPr id="10" name="Text 8"/>
-          <p:cNvSpPr/>
-          <p:nvPr/>
-        </p:nvSpPr>
-        <p:spPr>
-          <a:xfrm>
-            <a:off x="4480560" y="1938528"/>
-            <a:ext cx="3429000" cy="411480"/>
-          </a:xfrm>
-          <a:prstGeom prst="rect">
-            <a:avLst/>
-          </a:prstGeom>
-          <a:noFill/>
-          <a:ln/>
-        </p:spPr>
-        <p:txBody>
-          <a:bodyPr wrap="square" lIns="0" tIns="0" rIns="0" bIns="0" rtlCol="0" anchor="ctr">
-            <a:normAutofit/>
-          </a:bodyPr>
-          <a:lstStyle/>
-          <a:p>
-            <a:pPr marL="0" indent="0">
-              <a:buNone/>
-            </a:pPr>
-            <a:r>
-              <a:rPr lang="en-US" sz="1120" dirty="0">
-                <a:solidFill>
-                  <a:srgbClr val="17202A"/>
-                </a:solidFill>
-              </a:rPr>
-              <a:t>Sentimientos · Visión · Juegos</a:t>
-            </a:r>
-            <a:endParaRPr lang="en-US" sz="1120" dirty="0"/>
-          </a:p>
-        </p:txBody>
-      </p:sp>
-      <p:sp>
-        <p:nvSpPr>
-          <p:cNvPr id="11" name="Text 9"/>
-          <p:cNvSpPr/>
-          <p:nvPr/>
-        </p:nvSpPr>
-        <p:spPr>
-          <a:xfrm>
-            <a:off x="8229600" y="1600200"/>
-            <a:ext cx="3383280" cy="228600"/>
-          </a:xfrm>
-          <a:prstGeom prst="rect">
-            <a:avLst/>
-          </a:prstGeom>
-          <a:noFill/>
-          <a:ln/>
-        </p:spPr>
-        <p:txBody>
-          <a:bodyPr wrap="square" lIns="0" tIns="0" rIns="0" bIns="0" rtlCol="0" anchor="ctr"/>
-          <a:lstStyle/>
-          <a:p>
-            <a:pPr marL="0" indent="0">
-              <a:buNone/>
-            </a:pPr>
-            <a:r>
-              <a:rPr lang="en-US" sz="1500" b="1" dirty="0">
-                <a:solidFill>
-                  <a:srgbClr val="2D5BFF"/>
-                </a:solidFill>
-              </a:rPr>
-              <a:t>Ciclo 3</a:t>
-            </a:r>
-            <a:endParaRPr lang="en-US" sz="1500" dirty="0"/>
-          </a:p>
-        </p:txBody>
-      </p:sp>
-      <p:sp>
-        <p:nvSpPr>
-          <p:cNvPr id="12" name="Text 10"/>
-          <p:cNvSpPr/>
-          <p:nvPr/>
-        </p:nvSpPr>
-        <p:spPr>
-          <a:xfrm>
-            <a:off x="8229600" y="1938528"/>
-            <a:ext cx="3429000" cy="411480"/>
-          </a:xfrm>
-          <a:prstGeom prst="rect">
-            <a:avLst/>
-          </a:prstGeom>
-          <a:noFill/>
-          <a:ln/>
-        </p:spPr>
-        <p:txBody>
-          <a:bodyPr wrap="square" lIns="0" tIns="0" rIns="0" bIns="0" rtlCol="0" anchor="ctr">
-            <a:normAutofit/>
-          </a:bodyPr>
-          <a:lstStyle/>
-          <a:p>
-            <a:pPr marL="0" indent="0">
-              <a:buNone/>
-            </a:pPr>
-            <a:r>
-              <a:rPr lang="en-US" sz="1120" dirty="0">
-                <a:solidFill>
-                  <a:srgbClr val="17202A"/>
-                </a:solidFill>
-              </a:rPr>
-              <a:t>Chatbots · Optimización · Series</a:t>
-            </a:r>
-            <a:endParaRPr lang="en-US" sz="1120" dirty="0"/>
-          </a:p>
-        </p:txBody>
-      </p:sp>
-      <p:sp>
-        <p:nvSpPr>
-          <p:cNvPr id="13" name="Text 11"/>
-          <p:cNvSpPr/>
-          <p:nvPr/>
-        </p:nvSpPr>
-        <p:spPr>
-          <a:xfrm>
-            <a:off x="868680" y="2743200"/>
-            <a:ext cx="2011680" cy="420624"/>
-          </a:xfrm>
-          <a:prstGeom prst="rect">
-            <a:avLst/>
-          </a:prstGeom>
-          <a:noFill/>
-          <a:ln/>
-        </p:spPr>
-        <p:txBody>
-          <a:bodyPr wrap="square" lIns="0" tIns="0" rIns="0" bIns="0" rtlCol="0" anchor="ctr">
-            <a:normAutofit/>
-          </a:bodyPr>
-          <a:lstStyle/>
-          <a:p>
-            <a:pPr marL="0" indent="0">
-              <a:buNone/>
-            </a:pPr>
-            <a:r>
-              <a:rPr lang="en-US" sz="2400" b="1" dirty="0">
-                <a:solidFill>
-                  <a:srgbClr val="16825D"/>
-                </a:solidFill>
-              </a:rPr>
-              <a:t>27</a:t>
-            </a:r>
-            <a:endParaRPr lang="en-US" sz="2400" dirty="0"/>
-          </a:p>
-        </p:txBody>
-      </p:sp>
-      <p:sp>
-        <p:nvSpPr>
-          <p:cNvPr id="14" name="Text 12"/>
-          <p:cNvSpPr/>
-          <p:nvPr/>
-        </p:nvSpPr>
-        <p:spPr>
-          <a:xfrm>
-            <a:off x="868680" y="3200400"/>
-            <a:ext cx="2011680" cy="384048"/>
-          </a:xfrm>
-          <a:prstGeom prst="rect">
-            <a:avLst/>
-          </a:prstGeom>
-          <a:noFill/>
-          <a:ln/>
-        </p:spPr>
-        <p:txBody>
-          <a:bodyPr wrap="square" lIns="0" tIns="0" rIns="0" bIns="0" rtlCol="0" anchor="ctr">
-            <a:normAutofit/>
-          </a:bodyPr>
-          <a:lstStyle/>
-          <a:p>
-            <a:pPr marL="0" indent="0">
-              <a:buNone/>
-            </a:pPr>
-            <a:r>
-              <a:rPr lang="en-US" sz="1050" dirty="0">
-                <a:solidFill>
-                  <a:srgbClr val="5B6770"/>
-                </a:solidFill>
-              </a:rPr>
-              <a:t>casos con referencias</a:t>
-            </a:r>
-            <a:endParaRPr lang="en-US" sz="1050" dirty="0"/>
-          </a:p>
-        </p:txBody>
-      </p:sp>
-      <p:sp>
-        <p:nvSpPr>
-          <p:cNvPr id="15" name="Text 13"/>
-          <p:cNvSpPr/>
-          <p:nvPr/>
-        </p:nvSpPr>
-        <p:spPr>
-          <a:xfrm>
-            <a:off x="3657600" y="2743200"/>
-            <a:ext cx="2011680" cy="420624"/>
-          </a:xfrm>
-          <a:prstGeom prst="rect">
-            <a:avLst/>
-          </a:prstGeom>
-          <a:noFill/>
-          <a:ln/>
-        </p:spPr>
-        <p:txBody>
-          <a:bodyPr wrap="square" lIns="0" tIns="0" rIns="0" bIns="0" rtlCol="0" anchor="ctr">
-            <a:normAutofit/>
-          </a:bodyPr>
-          <a:lstStyle/>
-          <a:p>
-            <a:pPr marL="0" indent="0">
-              <a:buNone/>
-            </a:pPr>
-            <a:r>
-              <a:rPr lang="en-US" sz="2400" b="1" dirty="0">
-                <a:solidFill>
-                  <a:srgbClr val="7651C9"/>
-                </a:solidFill>
-              </a:rPr>
-              <a:t>3</a:t>
-            </a:r>
-            <a:endParaRPr lang="en-US" sz="2400" dirty="0"/>
-          </a:p>
-        </p:txBody>
-      </p:sp>
-      <p:sp>
-        <p:nvSpPr>
-          <p:cNvPr id="16" name="Text 14"/>
-          <p:cNvSpPr/>
-          <p:nvPr/>
-        </p:nvSpPr>
-        <p:spPr>
-          <a:xfrm>
-            <a:off x="3657600" y="3200400"/>
-            <a:ext cx="2011680" cy="384048"/>
-          </a:xfrm>
-          <a:prstGeom prst="rect">
-            <a:avLst/>
-          </a:prstGeom>
-          <a:noFill/>
-          <a:ln/>
-        </p:spPr>
-        <p:txBody>
-          <a:bodyPr wrap="square" lIns="0" tIns="0" rIns="0" bIns="0" rtlCol="0" anchor="ctr">
-            <a:normAutofit/>
-          </a:bodyPr>
-          <a:lstStyle/>
-          <a:p>
-            <a:pPr marL="0" indent="0">
-              <a:buNone/>
-            </a:pPr>
-            <a:r>
-              <a:rPr lang="en-US" sz="1050" dirty="0">
-                <a:solidFill>
-                  <a:srgbClr val="5B6770"/>
-                </a:solidFill>
-              </a:rPr>
-              <a:t>ambiguos</a:t>
-            </a:r>
-            <a:endParaRPr lang="en-US" sz="1050" dirty="0"/>
-          </a:p>
-        </p:txBody>
-      </p:sp>
-      <p:sp>
-        <p:nvSpPr>
-          <p:cNvPr id="17" name="Text 15"/>
-          <p:cNvSpPr/>
-          <p:nvPr/>
-        </p:nvSpPr>
-        <p:spPr>
-          <a:xfrm>
-            <a:off x="6446520" y="2743200"/>
-            <a:ext cx="2011680" cy="420624"/>
-          </a:xfrm>
-          <a:prstGeom prst="rect">
-            <a:avLst/>
-          </a:prstGeom>
-          <a:noFill/>
-          <a:ln/>
-        </p:spPr>
-        <p:txBody>
-          <a:bodyPr wrap="square" lIns="0" tIns="0" rIns="0" bIns="0" rtlCol="0" anchor="ctr">
-            <a:normAutofit/>
-          </a:bodyPr>
-          <a:lstStyle/>
-          <a:p>
-            <a:pPr marL="0" indent="0">
-              <a:buNone/>
-            </a:pPr>
-            <a:r>
-              <a:rPr lang="en-US" sz="2400" b="1" dirty="0">
-                <a:solidFill>
-                  <a:srgbClr val="B8483D"/>
-                </a:solidFill>
-              </a:rPr>
-              <a:t>2</a:t>
-            </a:r>
-            <a:endParaRPr lang="en-US" sz="2400" dirty="0"/>
-          </a:p>
-        </p:txBody>
-      </p:sp>
-      <p:sp>
-        <p:nvSpPr>
-          <p:cNvPr id="18" name="Text 16"/>
-          <p:cNvSpPr/>
-          <p:nvPr/>
-        </p:nvSpPr>
-        <p:spPr>
-          <a:xfrm>
-            <a:off x="6446520" y="3200400"/>
-            <a:ext cx="2011680" cy="384048"/>
-          </a:xfrm>
-          <a:prstGeom prst="rect">
-            <a:avLst/>
-          </a:prstGeom>
-          <a:noFill/>
-          <a:ln/>
-        </p:spPr>
-        <p:txBody>
-          <a:bodyPr wrap="square" lIns="0" tIns="0" rIns="0" bIns="0" rtlCol="0" anchor="ctr">
-            <a:normAutofit/>
-          </a:bodyPr>
-          <a:lstStyle/>
-          <a:p>
-            <a:pPr marL="0" indent="0">
-              <a:buNone/>
-            </a:pPr>
-            <a:r>
-              <a:rPr lang="en-US" sz="1050" dirty="0">
-                <a:solidFill>
-                  <a:srgbClr val="5B6770"/>
-                </a:solidFill>
-              </a:rPr>
-              <a:t>fuera de alcance</a:t>
-            </a:r>
-            <a:endParaRPr lang="en-US" sz="1050" dirty="0"/>
-          </a:p>
-        </p:txBody>
-      </p:sp>
-      <p:sp>
-        <p:nvSpPr>
-          <p:cNvPr id="19" name="Text 17"/>
-          <p:cNvSpPr/>
-          <p:nvPr/>
-        </p:nvSpPr>
-        <p:spPr>
-          <a:xfrm>
-            <a:off x="9235440" y="2743200"/>
-            <a:ext cx="2011680" cy="420624"/>
-          </a:xfrm>
-          <a:prstGeom prst="rect">
-            <a:avLst/>
-          </a:prstGeom>
-          <a:noFill/>
-          <a:ln/>
-        </p:spPr>
-        <p:txBody>
-          <a:bodyPr wrap="square" lIns="0" tIns="0" rIns="0" bIns="0" rtlCol="0" anchor="ctr">
-            <a:normAutofit/>
-          </a:bodyPr>
-          <a:lstStyle/>
-          <a:p>
-            <a:pPr marL="0" indent="0">
-              <a:buNone/>
-            </a:pPr>
-            <a:r>
-              <a:rPr lang="en-US" sz="2400" b="1" dirty="0">
-                <a:solidFill>
-                  <a:srgbClr val="F97316"/>
-                </a:solidFill>
-              </a:rPr>
-              <a:t>32</a:t>
-            </a:r>
-            <a:endParaRPr lang="en-US" sz="2400" dirty="0"/>
-          </a:p>
-        </p:txBody>
-      </p:sp>
-      <p:sp>
-        <p:nvSpPr>
-          <p:cNvPr id="20" name="Text 18"/>
-          <p:cNvSpPr/>
-          <p:nvPr/>
-        </p:nvSpPr>
-        <p:spPr>
-          <a:xfrm>
-            <a:off x="9235440" y="3200400"/>
-            <a:ext cx="2011680" cy="384048"/>
-          </a:xfrm>
-          <a:prstGeom prst="rect">
-            <a:avLst/>
-          </a:prstGeom>
-          <a:noFill/>
-          <a:ln/>
-        </p:spPr>
-        <p:txBody>
-          <a:bodyPr wrap="square" lIns="0" tIns="0" rIns="0" bIns="0" rtlCol="0" anchor="ctr">
-            <a:normAutofit/>
-          </a:bodyPr>
-          <a:lstStyle/>
-          <a:p>
-            <a:pPr marL="0" indent="0">
-              <a:buNone/>
-            </a:pPr>
-            <a:r>
-              <a:rPr lang="en-US" sz="1050" dirty="0">
-                <a:solidFill>
-                  <a:srgbClr val="5B6770"/>
-                </a:solidFill>
-              </a:rPr>
-              <a:t>casos totales</a:t>
-            </a:r>
-            <a:endParaRPr lang="en-US" sz="1050" dirty="0"/>
-          </a:p>
-        </p:txBody>
-      </p:sp>
-      <p:sp>
-        <p:nvSpPr>
-          <p:cNvPr id="21" name="Shape 19"/>
-          <p:cNvSpPr/>
-          <p:nvPr/>
-        </p:nvSpPr>
-        <p:spPr>
-          <a:xfrm>
-            <a:off x="868680" y="4572000"/>
-            <a:ext cx="5440680" cy="1207008"/>
-          </a:xfrm>
-          <a:prstGeom prst="roundRect">
-            <a:avLst>
-              <a:gd name="adj" fmla="val 3788"/>
-            </a:avLst>
-          </a:prstGeom>
-          <a:solidFill>
-            <a:srgbClr val="111827"/>
-          </a:solidFill>
-          <a:ln w="7620">
-            <a:solidFill>
-              <a:srgbClr val="28313E"/>
-            </a:solidFill>
-            <a:prstDash val="solid"/>
-          </a:ln>
-        </p:spPr>
-      </p:sp>
-      <p:sp>
-        <p:nvSpPr>
-          <p:cNvPr id="22" name="Text 20"/>
-          <p:cNvSpPr/>
-          <p:nvPr/>
-        </p:nvSpPr>
-        <p:spPr>
-          <a:xfrm>
-            <a:off x="978408" y="4663440"/>
-            <a:ext cx="5221224" cy="1024128"/>
-          </a:xfrm>
-          <a:prstGeom prst="rect">
-            <a:avLst/>
-          </a:prstGeom>
-          <a:noFill/>
-          <a:ln/>
-        </p:spPr>
-        <p:txBody>
-          <a:bodyPr wrap="square" lIns="0" tIns="0" rIns="0" bIns="0" rtlCol="0" anchor="ctr">
-            <a:normAutofit/>
-          </a:bodyPr>
-          <a:lstStyle/>
-          <a:p>
-            <a:pPr marL="0" indent="0">
-              <a:buNone/>
-            </a:pPr>
-            <a:r>
-              <a:rPr lang="en-US" sz="780" dirty="0">
-                <a:solidFill>
-                  <a:srgbClr val="E8EDF3"/>
-                </a:solidFill>
-                <a:latin typeface="Courier New" pitchFamily="34" charset="0"/>
-                <a:ea typeface="Courier New" pitchFamily="34" charset="-122"/>
-                <a:cs typeface="Courier New" pitchFamily="34" charset="-120"/>
-              </a:rPr>
-              <a:t>for curso, pregunta, keywords, respuesta in CONCEPTOS:</a:t>
-            </a:r>
-            <a:endParaRPr lang="en-US" sz="780" dirty="0"/>
-          </a:p>
-          <a:p>
-            <a:pPr marL="0" indent="0">
-              <a:buNone/>
-            </a:pPr>
-            <a:r>
-              <a:rPr lang="en-US" sz="780" dirty="0">
-                <a:solidFill>
-                  <a:srgbClr val="E8EDF3"/>
-                </a:solidFill>
-                <a:latin typeface="Courier New" pitchFamily="34" charset="0"/>
-                <a:ea typeface="Courier New" pitchFamily="34" charset="-122"/>
-                <a:cs typeface="Courier New" pitchFamily="34" charset="-120"/>
-              </a:rPr>
-              <a:t>    eval_set.append({</a:t>
-            </a:r>
-            <a:endParaRPr lang="en-US" sz="780" dirty="0"/>
-          </a:p>
-          <a:p>
-            <a:pPr marL="0" indent="0">
-              <a:buNone/>
-            </a:pPr>
-            <a:r>
-              <a:rPr lang="en-US" sz="780" dirty="0">
-                <a:solidFill>
-                  <a:srgbClr val="E8EDF3"/>
-                </a:solidFill>
-                <a:latin typeface="Courier New" pitchFamily="34" charset="0"/>
-                <a:ea typeface="Courier New" pitchFamily="34" charset="-122"/>
-                <a:cs typeface="Courier New" pitchFamily="34" charset="-120"/>
-              </a:rPr>
-              <a:t>        "curso": curso,</a:t>
-            </a:r>
-            <a:endParaRPr lang="en-US" sz="780" dirty="0"/>
-          </a:p>
-          <a:p>
-            <a:pPr marL="0" indent="0">
-              <a:buNone/>
-            </a:pPr>
-            <a:r>
-              <a:rPr lang="en-US" sz="780" dirty="0">
-                <a:solidFill>
-                  <a:srgbClr val="E8EDF3"/>
-                </a:solidFill>
-                <a:latin typeface="Courier New" pitchFamily="34" charset="0"/>
-                <a:ea typeface="Courier New" pitchFamily="34" charset="-122"/>
-                <a:cs typeface="Courier New" pitchFamily="34" charset="-120"/>
-              </a:rPr>
-              <a:t>        "herramienta_esperada": "responder_concepto",</a:t>
-            </a:r>
-            <a:endParaRPr lang="en-US" sz="780" dirty="0"/>
-          </a:p>
-          <a:p>
-            <a:pPr marL="0" indent="0">
-              <a:buNone/>
-            </a:pPr>
-            <a:r>
-              <a:rPr lang="en-US" sz="780" dirty="0">
-                <a:solidFill>
-                  <a:srgbClr val="E8EDF3"/>
-                </a:solidFill>
-                <a:latin typeface="Courier New" pitchFamily="34" charset="0"/>
-                <a:ea typeface="Courier New" pitchFamily="34" charset="-122"/>
-                <a:cs typeface="Courier New" pitchFamily="34" charset="-120"/>
-              </a:rPr>
-              <a:t>        "chunks_relevantes": referencias_para(curso, {"slide","transcripcion"}, keywords)</a:t>
-            </a:r>
-            <a:endParaRPr lang="en-US" sz="780" dirty="0"/>
-          </a:p>
-          <a:p>
-            <a:pPr marL="0" indent="0">
-              <a:buNone/>
-            </a:pPr>
-            <a:r>
-              <a:rPr lang="en-US" sz="780" dirty="0">
-                <a:solidFill>
-                  <a:srgbClr val="E8EDF3"/>
-                </a:solidFill>
-                <a:latin typeface="Courier New" pitchFamily="34" charset="0"/>
-                <a:ea typeface="Courier New" pitchFamily="34" charset="-122"/>
-                <a:cs typeface="Courier New" pitchFamily="34" charset="-120"/>
-              </a:rPr>
-              <a:t>    })</a:t>
-            </a:r>
-            <a:endParaRPr lang="en-US" sz="780" dirty="0"/>
-          </a:p>
-        </p:txBody>
-      </p:sp>
-      <p:sp>
-        <p:nvSpPr>
-          <p:cNvPr id="23" name="Shape 21"/>
-          <p:cNvSpPr/>
-          <p:nvPr/>
-        </p:nvSpPr>
-        <p:spPr>
-          <a:xfrm>
-            <a:off x="6629400" y="4572000"/>
-            <a:ext cx="4663440" cy="1207008"/>
-          </a:xfrm>
-          <a:prstGeom prst="roundRect">
-            <a:avLst>
-              <a:gd name="adj" fmla="val 3788"/>
-            </a:avLst>
-          </a:prstGeom>
-          <a:solidFill>
-            <a:srgbClr val="111827"/>
-          </a:solidFill>
-          <a:ln w="7620">
-            <a:solidFill>
-              <a:srgbClr val="28313E"/>
-            </a:solidFill>
-            <a:prstDash val="solid"/>
-          </a:ln>
-        </p:spPr>
-      </p:sp>
-      <p:sp>
-        <p:nvSpPr>
-          <p:cNvPr id="24" name="Text 22"/>
-          <p:cNvSpPr/>
-          <p:nvPr/>
-        </p:nvSpPr>
-        <p:spPr>
-          <a:xfrm>
-            <a:off x="6739128" y="4663440"/>
-            <a:ext cx="4443984" cy="1024128"/>
-          </a:xfrm>
-          <a:prstGeom prst="rect">
-            <a:avLst/>
-          </a:prstGeom>
-          <a:noFill/>
-          <a:ln/>
-        </p:spPr>
-        <p:txBody>
-          <a:bodyPr wrap="square" lIns="0" tIns="0" rIns="0" bIns="0" rtlCol="0" anchor="ctr">
-            <a:normAutofit/>
-          </a:bodyPr>
-          <a:lstStyle/>
-          <a:p>
-            <a:pPr marL="0" indent="0">
-              <a:buNone/>
-            </a:pPr>
-            <a:r>
-              <a:rPr lang="en-US" sz="810" dirty="0">
-                <a:solidFill>
-                  <a:srgbClr val="E8EDF3"/>
-                </a:solidFill>
-                <a:latin typeface="Courier New" pitchFamily="34" charset="0"/>
-                <a:ea typeface="Courier New" pitchFamily="34" charset="-122"/>
-                <a:cs typeface="Courier New" pitchFamily="34" charset="-120"/>
-              </a:rPr>
-              <a:t>EXTRAS = [</a:t>
-            </a:r>
-            <a:endParaRPr lang="en-US" sz="810" dirty="0"/>
-          </a:p>
-          <a:p>
-            <a:pPr marL="0" indent="0">
-              <a:buNone/>
-            </a:pPr>
-            <a:r>
-              <a:rPr lang="en-US" sz="810" dirty="0">
-                <a:solidFill>
-                  <a:srgbClr val="E8EDF3"/>
-                </a:solidFill>
-                <a:latin typeface="Courier New" pitchFamily="34" charset="0"/>
-                <a:ea typeface="Courier New" pitchFamily="34" charset="-122"/>
-                <a:cs typeface="Courier New" pitchFamily="34" charset="-120"/>
-              </a:rPr>
-              <a:t>  ("ambiguo", "¿Cómo lo hago?", "pedir_aclaracion", ...),</a:t>
-            </a:r>
-            <a:endParaRPr lang="en-US" sz="810" dirty="0"/>
-          </a:p>
-          <a:p>
-            <a:pPr marL="0" indent="0">
-              <a:buNone/>
-            </a:pPr>
-            <a:r>
-              <a:rPr lang="en-US" sz="810" dirty="0">
-                <a:solidFill>
-                  <a:srgbClr val="E8EDF3"/>
-                </a:solidFill>
-                <a:latin typeface="Courier New" pitchFamily="34" charset="0"/>
-                <a:ea typeface="Courier New" pitchFamily="34" charset="-122"/>
-                <a:cs typeface="Courier New" pitchFamily="34" charset="-120"/>
-              </a:rPr>
-              <a:t>  ("fuera_de_alcance", "¿Cuál es la capital de Japón?", "responder_concepto", ...),</a:t>
-            </a:r>
-            <a:endParaRPr lang="en-US" sz="810" dirty="0"/>
-          </a:p>
-          <a:p>
-            <a:pPr marL="0" indent="0">
-              <a:buNone/>
-            </a:pPr>
-            <a:r>
-              <a:rPr lang="en-US" sz="810" dirty="0">
-                <a:solidFill>
-                  <a:srgbClr val="E8EDF3"/>
-                </a:solidFill>
-                <a:latin typeface="Courier New" pitchFamily="34" charset="0"/>
-                <a:ea typeface="Courier New" pitchFamily="34" charset="-122"/>
-                <a:cs typeface="Courier New" pitchFamily="34" charset="-120"/>
-              </a:rPr>
-              <a:t>]</a:t>
-            </a:r>
-            <a:endParaRPr lang="en-US" sz="810" dirty="0"/>
-          </a:p>
-        </p:txBody>
-      </p:sp>
-      <p:sp>
-        <p:nvSpPr>
-          <p:cNvPr id="25" name="Text 23"/>
           <p:cNvSpPr/>
           <p:nvPr/>
         </p:nvSpPr>
@@ -10531,6 +10125,1047 @@
 
 <file path=ppt/slides/slide4.xml><?xml version="1.0" encoding="utf-8"?>
 <p:sld xmlns:a="http://schemas.openxmlformats.org/drawingml/2006/main" xmlns:r="http://schemas.openxmlformats.org/officeDocument/2006/relationships" xmlns:p="http://schemas.openxmlformats.org/presentationml/2006/main">
+  <p:cSld name="Slide 12">
+    <p:bg>
+      <p:bgPr>
+        <a:solidFill>
+          <a:srgbClr val="F7F4EC"/>
+        </a:solidFill>
+        <a:effectLst/>
+      </p:bgPr>
+    </p:bg>
+    <p:spTree>
+      <p:nvGrpSpPr>
+        <p:cNvPr id="1" name=""/>
+        <p:cNvGrpSpPr/>
+        <p:nvPr/>
+      </p:nvGrpSpPr>
+      <p:grpSpPr>
+        <a:xfrm>
+          <a:off x="0" y="0"/>
+          <a:ext cx="0" cy="0"/>
+          <a:chOff x="0" y="0"/>
+          <a:chExt cx="0" cy="0"/>
+        </a:xfrm>
+      </p:grpSpPr>
+      <p:sp>
+        <p:nvSpPr>
+          <p:cNvPr id="2" name="Text 0"/>
+          <p:cNvSpPr/>
+          <p:nvPr/>
+        </p:nvSpPr>
+        <p:spPr>
+          <a:xfrm>
+            <a:off x="411480" y="210312"/>
+            <a:ext cx="6217920" cy="182880"/>
+          </a:xfrm>
+          <a:prstGeom prst="rect">
+            <a:avLst/>
+          </a:prstGeom>
+          <a:noFill/>
+          <a:ln/>
+        </p:spPr>
+        <p:txBody>
+          <a:bodyPr wrap="square" lIns="0" tIns="0" rIns="0" bIns="0" rtlCol="0" anchor="ctr"/>
+          <a:lstStyle/>
+          <a:p>
+            <a:pPr marL="0" indent="0">
+              <a:buNone/>
+            </a:pPr>
+            <a:r>
+              <a:rPr lang="en-US" sz="850" dirty="0">
+                <a:solidFill>
+                  <a:srgbClr val="5B6770"/>
+                </a:solidFill>
+              </a:rPr>
+              <a:t>Diseño de evaluación</a:t>
+            </a:r>
+            <a:endParaRPr lang="en-US" sz="850" dirty="0"/>
+          </a:p>
+        </p:txBody>
+      </p:sp>
+      <p:sp>
+        <p:nvSpPr>
+          <p:cNvPr id="3" name="Text 1"/>
+          <p:cNvSpPr/>
+          <p:nvPr/>
+        </p:nvSpPr>
+        <p:spPr>
+          <a:xfrm>
+            <a:off x="11155680" y="164592"/>
+            <a:ext cx="594360" cy="228600"/>
+          </a:xfrm>
+          <a:prstGeom prst="rect">
+            <a:avLst/>
+          </a:prstGeom>
+          <a:noFill/>
+          <a:ln/>
+        </p:spPr>
+        <p:txBody>
+          <a:bodyPr wrap="square" lIns="0" tIns="0" rIns="0" bIns="0" rtlCol="0" anchor="ctr"/>
+          <a:lstStyle/>
+          <a:p>
+            <a:pPr marL="0" indent="0" algn="r">
+              <a:buNone/>
+            </a:pPr>
+            <a:r>
+              <a:rPr lang="en-US" sz="900" dirty="0">
+                <a:solidFill>
+                  <a:srgbClr val="5B6770"/>
+                </a:solidFill>
+              </a:rPr>
+              <a:t>12</a:t>
+            </a:r>
+            <a:endParaRPr lang="en-US" sz="900" dirty="0"/>
+          </a:p>
+        </p:txBody>
+      </p:sp>
+      <p:sp>
+        <p:nvSpPr>
+          <p:cNvPr id="4" name="Shape 2"/>
+          <p:cNvSpPr/>
+          <p:nvPr/>
+        </p:nvSpPr>
+        <p:spPr>
+          <a:xfrm>
+            <a:off x="411480" y="475488"/>
+            <a:ext cx="11384280" cy="0"/>
+          </a:xfrm>
+          <a:prstGeom prst="line">
+            <a:avLst/>
+          </a:prstGeom>
+          <a:noFill/>
+          <a:ln w="8890">
+            <a:solidFill>
+              <a:srgbClr val="D6CAB4"/>
+            </a:solidFill>
+            <a:prstDash val="solid"/>
+          </a:ln>
+        </p:spPr>
+      </p:sp>
+      <p:sp>
+        <p:nvSpPr>
+          <p:cNvPr id="5" name="Text 3"/>
+          <p:cNvSpPr/>
+          <p:nvPr/>
+        </p:nvSpPr>
+        <p:spPr>
+          <a:xfrm>
+            <a:off x="594359" y="658368"/>
+            <a:ext cx="9421707" cy="502920"/>
+          </a:xfrm>
+          <a:prstGeom prst="rect">
+            <a:avLst/>
+          </a:prstGeom>
+          <a:noFill/>
+          <a:ln/>
+        </p:spPr>
+        <p:txBody>
+          <a:bodyPr wrap="square" rtlCol="0" anchor="ctr">
+            <a:normAutofit/>
+          </a:bodyPr>
+          <a:lstStyle/>
+          <a:p>
+            <a:pPr marL="0" indent="0">
+              <a:buNone/>
+            </a:pPr>
+            <a:r>
+              <a:rPr lang="en-US" sz="2700" b="1" dirty="0">
+                <a:solidFill>
+                  <a:srgbClr val="17202A"/>
+                </a:solidFill>
+                <a:latin typeface="Aptos Display" pitchFamily="34" charset="0"/>
+                <a:ea typeface="Aptos Display" pitchFamily="34" charset="-122"/>
+                <a:cs typeface="Aptos Display" pitchFamily="34" charset="-120"/>
+              </a:rPr>
+              <a:t>El conjunto de validación prueba 9 cursos y 5 conductas</a:t>
+            </a:r>
+            <a:endParaRPr lang="en-US" sz="2700" dirty="0"/>
+          </a:p>
+        </p:txBody>
+      </p:sp>
+      <p:sp>
+        <p:nvSpPr>
+          <p:cNvPr id="6" name="Text 4"/>
+          <p:cNvSpPr/>
+          <p:nvPr/>
+        </p:nvSpPr>
+        <p:spPr>
+          <a:xfrm>
+            <a:off x="594360" y="1298448"/>
+            <a:ext cx="5257800" cy="128016"/>
+          </a:xfrm>
+          <a:prstGeom prst="rect">
+            <a:avLst/>
+          </a:prstGeom>
+          <a:noFill/>
+          <a:ln/>
+        </p:spPr>
+        <p:txBody>
+          <a:bodyPr wrap="square" lIns="0" tIns="0" rIns="0" bIns="0" rtlCol="0" anchor="ctr">
+            <a:normAutofit/>
+          </a:bodyPr>
+          <a:lstStyle/>
+          <a:p>
+            <a:pPr marL="0" indent="0">
+              <a:buNone/>
+            </a:pPr>
+            <a:r>
+              <a:rPr lang="en-US" sz="980" dirty="0">
+                <a:solidFill>
+                  <a:srgbClr val="5B6770"/>
+                </a:solidFill>
+              </a:rPr>
+              <a:t>Cada curso aporta una pregunta conceptual, una de código y una guía de tarea.</a:t>
+            </a:r>
+            <a:endParaRPr lang="en-US" sz="980" dirty="0"/>
+          </a:p>
+        </p:txBody>
+      </p:sp>
+      <p:sp>
+        <p:nvSpPr>
+          <p:cNvPr id="7" name="Text 5"/>
+          <p:cNvSpPr/>
+          <p:nvPr/>
+        </p:nvSpPr>
+        <p:spPr>
+          <a:xfrm>
+            <a:off x="731520" y="1600200"/>
+            <a:ext cx="3383280" cy="228600"/>
+          </a:xfrm>
+          <a:prstGeom prst="rect">
+            <a:avLst/>
+          </a:prstGeom>
+          <a:noFill/>
+          <a:ln/>
+        </p:spPr>
+        <p:txBody>
+          <a:bodyPr wrap="square" lIns="0" tIns="0" rIns="0" bIns="0" rtlCol="0" anchor="ctr"/>
+          <a:lstStyle/>
+          <a:p>
+            <a:pPr marL="0" indent="0">
+              <a:buNone/>
+            </a:pPr>
+            <a:r>
+              <a:rPr lang="en-US" sz="1500" b="1" dirty="0">
+                <a:solidFill>
+                  <a:srgbClr val="F97316"/>
+                </a:solidFill>
+              </a:rPr>
+              <a:t>Ciclo 1</a:t>
+            </a:r>
+            <a:endParaRPr lang="en-US" sz="1500" dirty="0"/>
+          </a:p>
+        </p:txBody>
+      </p:sp>
+      <p:sp>
+        <p:nvSpPr>
+          <p:cNvPr id="8" name="Text 6"/>
+          <p:cNvSpPr/>
+          <p:nvPr/>
+        </p:nvSpPr>
+        <p:spPr>
+          <a:xfrm>
+            <a:off x="731520" y="1938528"/>
+            <a:ext cx="3429000" cy="411480"/>
+          </a:xfrm>
+          <a:prstGeom prst="rect">
+            <a:avLst/>
+          </a:prstGeom>
+          <a:noFill/>
+          <a:ln/>
+        </p:spPr>
+        <p:txBody>
+          <a:bodyPr wrap="square" lIns="0" tIns="0" rIns="0" bIns="0" rtlCol="0" anchor="ctr">
+            <a:normAutofit/>
+          </a:bodyPr>
+          <a:lstStyle/>
+          <a:p>
+            <a:pPr marL="0" indent="0">
+              <a:buNone/>
+            </a:pPr>
+            <a:r>
+              <a:rPr lang="en-US" sz="1120" dirty="0">
+                <a:solidFill>
+                  <a:srgbClr val="17202A"/>
+                </a:solidFill>
+              </a:rPr>
+              <a:t>ML · Python · Visualización</a:t>
+            </a:r>
+            <a:endParaRPr lang="en-US" sz="1120" dirty="0"/>
+          </a:p>
+        </p:txBody>
+      </p:sp>
+      <p:sp>
+        <p:nvSpPr>
+          <p:cNvPr id="9" name="Text 7"/>
+          <p:cNvSpPr/>
+          <p:nvPr/>
+        </p:nvSpPr>
+        <p:spPr>
+          <a:xfrm>
+            <a:off x="4480560" y="1600200"/>
+            <a:ext cx="3383280" cy="228600"/>
+          </a:xfrm>
+          <a:prstGeom prst="rect">
+            <a:avLst/>
+          </a:prstGeom>
+          <a:noFill/>
+          <a:ln/>
+        </p:spPr>
+        <p:txBody>
+          <a:bodyPr wrap="square" lIns="0" tIns="0" rIns="0" bIns="0" rtlCol="0" anchor="ctr"/>
+          <a:lstStyle/>
+          <a:p>
+            <a:pPr marL="0" indent="0">
+              <a:buNone/>
+            </a:pPr>
+            <a:r>
+              <a:rPr lang="en-US" sz="1500" b="1" dirty="0">
+                <a:solidFill>
+                  <a:srgbClr val="16825D"/>
+                </a:solidFill>
+              </a:rPr>
+              <a:t>Ciclo 2</a:t>
+            </a:r>
+            <a:endParaRPr lang="en-US" sz="1500" dirty="0"/>
+          </a:p>
+        </p:txBody>
+      </p:sp>
+      <p:sp>
+        <p:nvSpPr>
+          <p:cNvPr id="10" name="Text 8"/>
+          <p:cNvSpPr/>
+          <p:nvPr/>
+        </p:nvSpPr>
+        <p:spPr>
+          <a:xfrm>
+            <a:off x="4480560" y="1938528"/>
+            <a:ext cx="3429000" cy="411480"/>
+          </a:xfrm>
+          <a:prstGeom prst="rect">
+            <a:avLst/>
+          </a:prstGeom>
+          <a:noFill/>
+          <a:ln/>
+        </p:spPr>
+        <p:txBody>
+          <a:bodyPr wrap="square" lIns="0" tIns="0" rIns="0" bIns="0" rtlCol="0" anchor="ctr">
+            <a:normAutofit/>
+          </a:bodyPr>
+          <a:lstStyle/>
+          <a:p>
+            <a:pPr marL="0" indent="0">
+              <a:buNone/>
+            </a:pPr>
+            <a:r>
+              <a:rPr lang="en-US" sz="1120" dirty="0">
+                <a:solidFill>
+                  <a:srgbClr val="17202A"/>
+                </a:solidFill>
+              </a:rPr>
+              <a:t>Sentimientos · Visión · Juegos</a:t>
+            </a:r>
+            <a:endParaRPr lang="en-US" sz="1120" dirty="0"/>
+          </a:p>
+        </p:txBody>
+      </p:sp>
+      <p:sp>
+        <p:nvSpPr>
+          <p:cNvPr id="11" name="Text 9"/>
+          <p:cNvSpPr/>
+          <p:nvPr/>
+        </p:nvSpPr>
+        <p:spPr>
+          <a:xfrm>
+            <a:off x="8229600" y="1600200"/>
+            <a:ext cx="3383280" cy="228600"/>
+          </a:xfrm>
+          <a:prstGeom prst="rect">
+            <a:avLst/>
+          </a:prstGeom>
+          <a:noFill/>
+          <a:ln/>
+        </p:spPr>
+        <p:txBody>
+          <a:bodyPr wrap="square" lIns="0" tIns="0" rIns="0" bIns="0" rtlCol="0" anchor="ctr"/>
+          <a:lstStyle/>
+          <a:p>
+            <a:pPr marL="0" indent="0">
+              <a:buNone/>
+            </a:pPr>
+            <a:r>
+              <a:rPr lang="en-US" sz="1500" b="1" dirty="0">
+                <a:solidFill>
+                  <a:srgbClr val="2D5BFF"/>
+                </a:solidFill>
+              </a:rPr>
+              <a:t>Ciclo 3</a:t>
+            </a:r>
+            <a:endParaRPr lang="en-US" sz="1500" dirty="0"/>
+          </a:p>
+        </p:txBody>
+      </p:sp>
+      <p:sp>
+        <p:nvSpPr>
+          <p:cNvPr id="12" name="Text 10"/>
+          <p:cNvSpPr/>
+          <p:nvPr/>
+        </p:nvSpPr>
+        <p:spPr>
+          <a:xfrm>
+            <a:off x="8229600" y="1938528"/>
+            <a:ext cx="3429000" cy="411480"/>
+          </a:xfrm>
+          <a:prstGeom prst="rect">
+            <a:avLst/>
+          </a:prstGeom>
+          <a:noFill/>
+          <a:ln/>
+        </p:spPr>
+        <p:txBody>
+          <a:bodyPr wrap="square" lIns="0" tIns="0" rIns="0" bIns="0" rtlCol="0" anchor="ctr">
+            <a:normAutofit/>
+          </a:bodyPr>
+          <a:lstStyle/>
+          <a:p>
+            <a:pPr marL="0" indent="0">
+              <a:buNone/>
+            </a:pPr>
+            <a:r>
+              <a:rPr lang="en-US" sz="1120" dirty="0">
+                <a:solidFill>
+                  <a:srgbClr val="17202A"/>
+                </a:solidFill>
+              </a:rPr>
+              <a:t>Chatbots · Optimización · Series</a:t>
+            </a:r>
+            <a:endParaRPr lang="en-US" sz="1120" dirty="0"/>
+          </a:p>
+        </p:txBody>
+      </p:sp>
+      <p:sp>
+        <p:nvSpPr>
+          <p:cNvPr id="13" name="Text 11"/>
+          <p:cNvSpPr/>
+          <p:nvPr/>
+        </p:nvSpPr>
+        <p:spPr>
+          <a:xfrm>
+            <a:off x="868680" y="2743200"/>
+            <a:ext cx="2011680" cy="420624"/>
+          </a:xfrm>
+          <a:prstGeom prst="rect">
+            <a:avLst/>
+          </a:prstGeom>
+          <a:noFill/>
+          <a:ln/>
+        </p:spPr>
+        <p:txBody>
+          <a:bodyPr wrap="square" lIns="0" tIns="0" rIns="0" bIns="0" rtlCol="0" anchor="ctr">
+            <a:normAutofit/>
+          </a:bodyPr>
+          <a:lstStyle/>
+          <a:p>
+            <a:pPr marL="0" indent="0">
+              <a:buNone/>
+            </a:pPr>
+            <a:r>
+              <a:rPr lang="en-US" sz="2400" b="1" dirty="0">
+                <a:solidFill>
+                  <a:srgbClr val="16825D"/>
+                </a:solidFill>
+              </a:rPr>
+              <a:t>27</a:t>
+            </a:r>
+            <a:endParaRPr lang="en-US" sz="2400" dirty="0"/>
+          </a:p>
+        </p:txBody>
+      </p:sp>
+      <p:sp>
+        <p:nvSpPr>
+          <p:cNvPr id="14" name="Text 12"/>
+          <p:cNvSpPr/>
+          <p:nvPr/>
+        </p:nvSpPr>
+        <p:spPr>
+          <a:xfrm>
+            <a:off x="868680" y="3200400"/>
+            <a:ext cx="2011680" cy="384048"/>
+          </a:xfrm>
+          <a:prstGeom prst="rect">
+            <a:avLst/>
+          </a:prstGeom>
+          <a:noFill/>
+          <a:ln/>
+        </p:spPr>
+        <p:txBody>
+          <a:bodyPr wrap="square" lIns="0" tIns="0" rIns="0" bIns="0" rtlCol="0" anchor="ctr">
+            <a:normAutofit/>
+          </a:bodyPr>
+          <a:lstStyle/>
+          <a:p>
+            <a:pPr marL="0" indent="0">
+              <a:buNone/>
+            </a:pPr>
+            <a:r>
+              <a:rPr lang="en-US" sz="1050" dirty="0">
+                <a:solidFill>
+                  <a:srgbClr val="5B6770"/>
+                </a:solidFill>
+              </a:rPr>
+              <a:t>casos con referencias</a:t>
+            </a:r>
+            <a:endParaRPr lang="en-US" sz="1050" dirty="0"/>
+          </a:p>
+        </p:txBody>
+      </p:sp>
+      <p:sp>
+        <p:nvSpPr>
+          <p:cNvPr id="15" name="Text 13"/>
+          <p:cNvSpPr/>
+          <p:nvPr/>
+        </p:nvSpPr>
+        <p:spPr>
+          <a:xfrm>
+            <a:off x="3657600" y="2743200"/>
+            <a:ext cx="2011680" cy="420624"/>
+          </a:xfrm>
+          <a:prstGeom prst="rect">
+            <a:avLst/>
+          </a:prstGeom>
+          <a:noFill/>
+          <a:ln/>
+        </p:spPr>
+        <p:txBody>
+          <a:bodyPr wrap="square" lIns="0" tIns="0" rIns="0" bIns="0" rtlCol="0" anchor="ctr">
+            <a:normAutofit/>
+          </a:bodyPr>
+          <a:lstStyle/>
+          <a:p>
+            <a:pPr marL="0" indent="0">
+              <a:buNone/>
+            </a:pPr>
+            <a:r>
+              <a:rPr lang="en-US" sz="2400" b="1" dirty="0">
+                <a:solidFill>
+                  <a:srgbClr val="7651C9"/>
+                </a:solidFill>
+              </a:rPr>
+              <a:t>3</a:t>
+            </a:r>
+            <a:endParaRPr lang="en-US" sz="2400" dirty="0"/>
+          </a:p>
+        </p:txBody>
+      </p:sp>
+      <p:sp>
+        <p:nvSpPr>
+          <p:cNvPr id="16" name="Text 14"/>
+          <p:cNvSpPr/>
+          <p:nvPr/>
+        </p:nvSpPr>
+        <p:spPr>
+          <a:xfrm>
+            <a:off x="3657600" y="3200400"/>
+            <a:ext cx="2011680" cy="384048"/>
+          </a:xfrm>
+          <a:prstGeom prst="rect">
+            <a:avLst/>
+          </a:prstGeom>
+          <a:noFill/>
+          <a:ln/>
+        </p:spPr>
+        <p:txBody>
+          <a:bodyPr wrap="square" lIns="0" tIns="0" rIns="0" bIns="0" rtlCol="0" anchor="ctr">
+            <a:normAutofit/>
+          </a:bodyPr>
+          <a:lstStyle/>
+          <a:p>
+            <a:pPr marL="0" indent="0">
+              <a:buNone/>
+            </a:pPr>
+            <a:r>
+              <a:rPr lang="en-US" sz="1050" dirty="0">
+                <a:solidFill>
+                  <a:srgbClr val="5B6770"/>
+                </a:solidFill>
+              </a:rPr>
+              <a:t>ambiguos</a:t>
+            </a:r>
+            <a:endParaRPr lang="en-US" sz="1050" dirty="0"/>
+          </a:p>
+        </p:txBody>
+      </p:sp>
+      <p:sp>
+        <p:nvSpPr>
+          <p:cNvPr id="17" name="Text 15"/>
+          <p:cNvSpPr/>
+          <p:nvPr/>
+        </p:nvSpPr>
+        <p:spPr>
+          <a:xfrm>
+            <a:off x="6446520" y="2743200"/>
+            <a:ext cx="2011680" cy="420624"/>
+          </a:xfrm>
+          <a:prstGeom prst="rect">
+            <a:avLst/>
+          </a:prstGeom>
+          <a:noFill/>
+          <a:ln/>
+        </p:spPr>
+        <p:txBody>
+          <a:bodyPr wrap="square" lIns="0" tIns="0" rIns="0" bIns="0" rtlCol="0" anchor="ctr">
+            <a:normAutofit/>
+          </a:bodyPr>
+          <a:lstStyle/>
+          <a:p>
+            <a:pPr marL="0" indent="0">
+              <a:buNone/>
+            </a:pPr>
+            <a:r>
+              <a:rPr lang="en-US" sz="2400" b="1" dirty="0">
+                <a:solidFill>
+                  <a:srgbClr val="B8483D"/>
+                </a:solidFill>
+              </a:rPr>
+              <a:t>2</a:t>
+            </a:r>
+            <a:endParaRPr lang="en-US" sz="2400" dirty="0"/>
+          </a:p>
+        </p:txBody>
+      </p:sp>
+      <p:sp>
+        <p:nvSpPr>
+          <p:cNvPr id="18" name="Text 16"/>
+          <p:cNvSpPr/>
+          <p:nvPr/>
+        </p:nvSpPr>
+        <p:spPr>
+          <a:xfrm>
+            <a:off x="6446520" y="3200400"/>
+            <a:ext cx="2011680" cy="384048"/>
+          </a:xfrm>
+          <a:prstGeom prst="rect">
+            <a:avLst/>
+          </a:prstGeom>
+          <a:noFill/>
+          <a:ln/>
+        </p:spPr>
+        <p:txBody>
+          <a:bodyPr wrap="square" lIns="0" tIns="0" rIns="0" bIns="0" rtlCol="0" anchor="ctr">
+            <a:normAutofit/>
+          </a:bodyPr>
+          <a:lstStyle/>
+          <a:p>
+            <a:pPr marL="0" indent="0">
+              <a:buNone/>
+            </a:pPr>
+            <a:r>
+              <a:rPr lang="en-US" sz="1050" dirty="0">
+                <a:solidFill>
+                  <a:srgbClr val="5B6770"/>
+                </a:solidFill>
+              </a:rPr>
+              <a:t>fuera de alcance</a:t>
+            </a:r>
+            <a:endParaRPr lang="en-US" sz="1050" dirty="0"/>
+          </a:p>
+        </p:txBody>
+      </p:sp>
+      <p:sp>
+        <p:nvSpPr>
+          <p:cNvPr id="19" name="Text 17"/>
+          <p:cNvSpPr/>
+          <p:nvPr/>
+        </p:nvSpPr>
+        <p:spPr>
+          <a:xfrm>
+            <a:off x="9235440" y="2743200"/>
+            <a:ext cx="2011680" cy="420624"/>
+          </a:xfrm>
+          <a:prstGeom prst="rect">
+            <a:avLst/>
+          </a:prstGeom>
+          <a:noFill/>
+          <a:ln/>
+        </p:spPr>
+        <p:txBody>
+          <a:bodyPr wrap="square" lIns="0" tIns="0" rIns="0" bIns="0" rtlCol="0" anchor="ctr">
+            <a:normAutofit/>
+          </a:bodyPr>
+          <a:lstStyle/>
+          <a:p>
+            <a:pPr marL="0" indent="0">
+              <a:buNone/>
+            </a:pPr>
+            <a:r>
+              <a:rPr lang="en-US" sz="2400" b="1" dirty="0">
+                <a:solidFill>
+                  <a:srgbClr val="F97316"/>
+                </a:solidFill>
+              </a:rPr>
+              <a:t>32</a:t>
+            </a:r>
+            <a:endParaRPr lang="en-US" sz="2400" dirty="0"/>
+          </a:p>
+        </p:txBody>
+      </p:sp>
+      <p:sp>
+        <p:nvSpPr>
+          <p:cNvPr id="20" name="Text 18"/>
+          <p:cNvSpPr/>
+          <p:nvPr/>
+        </p:nvSpPr>
+        <p:spPr>
+          <a:xfrm>
+            <a:off x="9235440" y="3200400"/>
+            <a:ext cx="2011680" cy="384048"/>
+          </a:xfrm>
+          <a:prstGeom prst="rect">
+            <a:avLst/>
+          </a:prstGeom>
+          <a:noFill/>
+          <a:ln/>
+        </p:spPr>
+        <p:txBody>
+          <a:bodyPr wrap="square" lIns="0" tIns="0" rIns="0" bIns="0" rtlCol="0" anchor="ctr">
+            <a:normAutofit/>
+          </a:bodyPr>
+          <a:lstStyle/>
+          <a:p>
+            <a:pPr marL="0" indent="0">
+              <a:buNone/>
+            </a:pPr>
+            <a:r>
+              <a:rPr lang="en-US" sz="1050" dirty="0">
+                <a:solidFill>
+                  <a:srgbClr val="5B6770"/>
+                </a:solidFill>
+              </a:rPr>
+              <a:t>casos totales</a:t>
+            </a:r>
+            <a:endParaRPr lang="en-US" sz="1050" dirty="0"/>
+          </a:p>
+        </p:txBody>
+      </p:sp>
+      <p:sp>
+        <p:nvSpPr>
+          <p:cNvPr id="21" name="Shape 19"/>
+          <p:cNvSpPr/>
+          <p:nvPr/>
+        </p:nvSpPr>
+        <p:spPr>
+          <a:xfrm>
+            <a:off x="868680" y="4572000"/>
+            <a:ext cx="5440680" cy="1207008"/>
+          </a:xfrm>
+          <a:prstGeom prst="roundRect">
+            <a:avLst>
+              <a:gd name="adj" fmla="val 3788"/>
+            </a:avLst>
+          </a:prstGeom>
+          <a:solidFill>
+            <a:srgbClr val="111827"/>
+          </a:solidFill>
+          <a:ln w="7620">
+            <a:solidFill>
+              <a:srgbClr val="28313E"/>
+            </a:solidFill>
+            <a:prstDash val="solid"/>
+          </a:ln>
+        </p:spPr>
+      </p:sp>
+      <p:sp>
+        <p:nvSpPr>
+          <p:cNvPr id="22" name="Text 20"/>
+          <p:cNvSpPr/>
+          <p:nvPr/>
+        </p:nvSpPr>
+        <p:spPr>
+          <a:xfrm>
+            <a:off x="978408" y="4663440"/>
+            <a:ext cx="5221224" cy="1024128"/>
+          </a:xfrm>
+          <a:prstGeom prst="rect">
+            <a:avLst/>
+          </a:prstGeom>
+          <a:noFill/>
+          <a:ln/>
+        </p:spPr>
+        <p:txBody>
+          <a:bodyPr wrap="square" lIns="0" tIns="0" rIns="0" bIns="0" rtlCol="0" anchor="ctr">
+            <a:normAutofit/>
+          </a:bodyPr>
+          <a:lstStyle/>
+          <a:p>
+            <a:pPr marL="0" indent="0">
+              <a:buNone/>
+            </a:pPr>
+            <a:r>
+              <a:rPr lang="en-US" sz="780" dirty="0">
+                <a:solidFill>
+                  <a:srgbClr val="E8EDF3"/>
+                </a:solidFill>
+                <a:latin typeface="Courier New" pitchFamily="34" charset="0"/>
+                <a:ea typeface="Courier New" pitchFamily="34" charset="-122"/>
+                <a:cs typeface="Courier New" pitchFamily="34" charset="-120"/>
+              </a:rPr>
+              <a:t>for curso, pregunta, keywords, respuesta in CONCEPTOS:</a:t>
+            </a:r>
+            <a:endParaRPr lang="en-US" sz="780" dirty="0"/>
+          </a:p>
+          <a:p>
+            <a:pPr marL="0" indent="0">
+              <a:buNone/>
+            </a:pPr>
+            <a:r>
+              <a:rPr lang="en-US" sz="780" dirty="0">
+                <a:solidFill>
+                  <a:srgbClr val="E8EDF3"/>
+                </a:solidFill>
+                <a:latin typeface="Courier New" pitchFamily="34" charset="0"/>
+                <a:ea typeface="Courier New" pitchFamily="34" charset="-122"/>
+                <a:cs typeface="Courier New" pitchFamily="34" charset="-120"/>
+              </a:rPr>
+              <a:t>    eval_set.append({</a:t>
+            </a:r>
+            <a:endParaRPr lang="en-US" sz="780" dirty="0"/>
+          </a:p>
+          <a:p>
+            <a:pPr marL="0" indent="0">
+              <a:buNone/>
+            </a:pPr>
+            <a:r>
+              <a:rPr lang="en-US" sz="780" dirty="0">
+                <a:solidFill>
+                  <a:srgbClr val="E8EDF3"/>
+                </a:solidFill>
+                <a:latin typeface="Courier New" pitchFamily="34" charset="0"/>
+                <a:ea typeface="Courier New" pitchFamily="34" charset="-122"/>
+                <a:cs typeface="Courier New" pitchFamily="34" charset="-120"/>
+              </a:rPr>
+              <a:t>        "curso": curso,</a:t>
+            </a:r>
+            <a:endParaRPr lang="en-US" sz="780" dirty="0"/>
+          </a:p>
+          <a:p>
+            <a:pPr marL="0" indent="0">
+              <a:buNone/>
+            </a:pPr>
+            <a:r>
+              <a:rPr lang="en-US" sz="780" dirty="0">
+                <a:solidFill>
+                  <a:srgbClr val="E8EDF3"/>
+                </a:solidFill>
+                <a:latin typeface="Courier New" pitchFamily="34" charset="0"/>
+                <a:ea typeface="Courier New" pitchFamily="34" charset="-122"/>
+                <a:cs typeface="Courier New" pitchFamily="34" charset="-120"/>
+              </a:rPr>
+              <a:t>        "herramienta_esperada": "responder_concepto",</a:t>
+            </a:r>
+            <a:endParaRPr lang="en-US" sz="780" dirty="0"/>
+          </a:p>
+          <a:p>
+            <a:pPr marL="0" indent="0">
+              <a:buNone/>
+            </a:pPr>
+            <a:r>
+              <a:rPr lang="en-US" sz="780" dirty="0">
+                <a:solidFill>
+                  <a:srgbClr val="E8EDF3"/>
+                </a:solidFill>
+                <a:latin typeface="Courier New" pitchFamily="34" charset="0"/>
+                <a:ea typeface="Courier New" pitchFamily="34" charset="-122"/>
+                <a:cs typeface="Courier New" pitchFamily="34" charset="-120"/>
+              </a:rPr>
+              <a:t>        "chunks_relevantes": referencias_para(curso, {"slide","transcripcion"}, keywords)</a:t>
+            </a:r>
+            <a:endParaRPr lang="en-US" sz="780" dirty="0"/>
+          </a:p>
+          <a:p>
+            <a:pPr marL="0" indent="0">
+              <a:buNone/>
+            </a:pPr>
+            <a:r>
+              <a:rPr lang="en-US" sz="780" dirty="0">
+                <a:solidFill>
+                  <a:srgbClr val="E8EDF3"/>
+                </a:solidFill>
+                <a:latin typeface="Courier New" pitchFamily="34" charset="0"/>
+                <a:ea typeface="Courier New" pitchFamily="34" charset="-122"/>
+                <a:cs typeface="Courier New" pitchFamily="34" charset="-120"/>
+              </a:rPr>
+              <a:t>    })</a:t>
+            </a:r>
+            <a:endParaRPr lang="en-US" sz="780" dirty="0"/>
+          </a:p>
+        </p:txBody>
+      </p:sp>
+      <p:sp>
+        <p:nvSpPr>
+          <p:cNvPr id="23" name="Shape 21"/>
+          <p:cNvSpPr/>
+          <p:nvPr/>
+        </p:nvSpPr>
+        <p:spPr>
+          <a:xfrm>
+            <a:off x="6629400" y="4572000"/>
+            <a:ext cx="4663440" cy="1207008"/>
+          </a:xfrm>
+          <a:prstGeom prst="roundRect">
+            <a:avLst>
+              <a:gd name="adj" fmla="val 3788"/>
+            </a:avLst>
+          </a:prstGeom>
+          <a:solidFill>
+            <a:srgbClr val="111827"/>
+          </a:solidFill>
+          <a:ln w="7620">
+            <a:solidFill>
+              <a:srgbClr val="28313E"/>
+            </a:solidFill>
+            <a:prstDash val="solid"/>
+          </a:ln>
+        </p:spPr>
+      </p:sp>
+      <p:sp>
+        <p:nvSpPr>
+          <p:cNvPr id="24" name="Text 22"/>
+          <p:cNvSpPr/>
+          <p:nvPr/>
+        </p:nvSpPr>
+        <p:spPr>
+          <a:xfrm>
+            <a:off x="6739128" y="4663440"/>
+            <a:ext cx="4443984" cy="1024128"/>
+          </a:xfrm>
+          <a:prstGeom prst="rect">
+            <a:avLst/>
+          </a:prstGeom>
+          <a:noFill/>
+          <a:ln/>
+        </p:spPr>
+        <p:txBody>
+          <a:bodyPr wrap="square" lIns="0" tIns="0" rIns="0" bIns="0" rtlCol="0" anchor="ctr">
+            <a:normAutofit/>
+          </a:bodyPr>
+          <a:lstStyle/>
+          <a:p>
+            <a:pPr marL="0" indent="0">
+              <a:buNone/>
+            </a:pPr>
+            <a:r>
+              <a:rPr lang="en-US" sz="810" dirty="0">
+                <a:solidFill>
+                  <a:srgbClr val="E8EDF3"/>
+                </a:solidFill>
+                <a:latin typeface="Courier New" pitchFamily="34" charset="0"/>
+                <a:ea typeface="Courier New" pitchFamily="34" charset="-122"/>
+                <a:cs typeface="Courier New" pitchFamily="34" charset="-120"/>
+              </a:rPr>
+              <a:t>EXTRAS = [</a:t>
+            </a:r>
+            <a:endParaRPr lang="en-US" sz="810" dirty="0"/>
+          </a:p>
+          <a:p>
+            <a:pPr marL="0" indent="0">
+              <a:buNone/>
+            </a:pPr>
+            <a:r>
+              <a:rPr lang="en-US" sz="810" dirty="0">
+                <a:solidFill>
+                  <a:srgbClr val="E8EDF3"/>
+                </a:solidFill>
+                <a:latin typeface="Courier New" pitchFamily="34" charset="0"/>
+                <a:ea typeface="Courier New" pitchFamily="34" charset="-122"/>
+                <a:cs typeface="Courier New" pitchFamily="34" charset="-120"/>
+              </a:rPr>
+              <a:t>  ("ambiguo", "¿Cómo lo hago?", "pedir_aclaracion", ...),</a:t>
+            </a:r>
+            <a:endParaRPr lang="en-US" sz="810" dirty="0"/>
+          </a:p>
+          <a:p>
+            <a:pPr marL="0" indent="0">
+              <a:buNone/>
+            </a:pPr>
+            <a:r>
+              <a:rPr lang="en-US" sz="810" dirty="0">
+                <a:solidFill>
+                  <a:srgbClr val="E8EDF3"/>
+                </a:solidFill>
+                <a:latin typeface="Courier New" pitchFamily="34" charset="0"/>
+                <a:ea typeface="Courier New" pitchFamily="34" charset="-122"/>
+                <a:cs typeface="Courier New" pitchFamily="34" charset="-120"/>
+              </a:rPr>
+              <a:t>  ("fuera_de_alcance", "¿Cuál es la capital de Japón?", "responder_concepto", ...),</a:t>
+            </a:r>
+            <a:endParaRPr lang="en-US" sz="810" dirty="0"/>
+          </a:p>
+          <a:p>
+            <a:pPr marL="0" indent="0">
+              <a:buNone/>
+            </a:pPr>
+            <a:r>
+              <a:rPr lang="en-US" sz="810" dirty="0">
+                <a:solidFill>
+                  <a:srgbClr val="E8EDF3"/>
+                </a:solidFill>
+                <a:latin typeface="Courier New" pitchFamily="34" charset="0"/>
+                <a:ea typeface="Courier New" pitchFamily="34" charset="-122"/>
+                <a:cs typeface="Courier New" pitchFamily="34" charset="-120"/>
+              </a:rPr>
+              <a:t>]</a:t>
+            </a:r>
+            <a:endParaRPr lang="en-US" sz="810" dirty="0"/>
+          </a:p>
+        </p:txBody>
+      </p:sp>
+      <p:sp>
+        <p:nvSpPr>
+          <p:cNvPr id="25" name="Text 23"/>
+          <p:cNvSpPr/>
+          <p:nvPr/>
+        </p:nvSpPr>
+        <p:spPr>
+          <a:xfrm>
+            <a:off x="594360" y="6565392"/>
+            <a:ext cx="7315200" cy="182880"/>
+          </a:xfrm>
+          <a:prstGeom prst="rect">
+            <a:avLst/>
+          </a:prstGeom>
+          <a:noFill/>
+          <a:ln/>
+        </p:spPr>
+        <p:txBody>
+          <a:bodyPr wrap="square" lIns="0" tIns="0" rIns="0" bIns="0" rtlCol="0" anchor="ctr"/>
+          <a:lstStyle/>
+          <a:p>
+            <a:pPr marL="0" indent="0">
+              <a:buNone/>
+            </a:pPr>
+            <a:r>
+              <a:rPr lang="en-US" sz="770" dirty="0">
+                <a:solidFill>
+                  <a:srgbClr val="8B8275"/>
+                </a:solidFill>
+              </a:rPr>
+              <a:t>TutorBot · Entregable 3</a:t>
+            </a:r>
+            <a:endParaRPr lang="en-US" sz="770" dirty="0"/>
+          </a:p>
+        </p:txBody>
+      </p:sp>
+    </p:spTree>
+  </p:cSld>
+  <p:clrMapOvr>
+    <a:masterClrMapping/>
+  </p:clrMapOvr>
+</p:sld>
+</file>
+
+<file path=ppt/slides/slide5.xml><?xml version="1.0" encoding="utf-8"?>
+<p:sld xmlns:a="http://schemas.openxmlformats.org/drawingml/2006/main" xmlns:r="http://schemas.openxmlformats.org/officeDocument/2006/relationships" xmlns:p="http://schemas.openxmlformats.org/presentationml/2006/main">
   <p:cSld name="Slide 4">
     <p:bg>
       <p:bgPr>
@@ -11517,7 +12152,7 @@
 </p:sld>
 </file>
 
-<file path=ppt/slides/slide5.xml><?xml version="1.0" encoding="utf-8"?>
+<file path=ppt/slides/slide6.xml><?xml version="1.0" encoding="utf-8"?>
 <p:sld xmlns:a="http://schemas.openxmlformats.org/drawingml/2006/main" xmlns:r="http://schemas.openxmlformats.org/officeDocument/2006/relationships" xmlns:p="http://schemas.openxmlformats.org/presentationml/2006/main">
   <p:cSld name="Slide 5">
     <p:bg>
@@ -12734,7 +13369,7 @@
 </p:sld>
 </file>
 
-<file path=ppt/slides/slide6.xml><?xml version="1.0" encoding="utf-8"?>
+<file path=ppt/slides/slide7.xml><?xml version="1.0" encoding="utf-8"?>
 <p:sld xmlns:a="http://schemas.openxmlformats.org/drawingml/2006/main" xmlns:r="http://schemas.openxmlformats.org/officeDocument/2006/relationships" xmlns:p="http://schemas.openxmlformats.org/presentationml/2006/main">
   <p:cSld name="Slide 6">
     <p:bg>
@@ -13527,7 +14162,7 @@
 </p:sld>
 </file>
 
-<file path=ppt/slides/slide7.xml><?xml version="1.0" encoding="utf-8"?>
+<file path=ppt/slides/slide8.xml><?xml version="1.0" encoding="utf-8"?>
 <p:sld xmlns:a="http://schemas.openxmlformats.org/drawingml/2006/main" xmlns:r="http://schemas.openxmlformats.org/officeDocument/2006/relationships" xmlns:p="http://schemas.openxmlformats.org/presentationml/2006/main">
   <p:cSld name="Slide 7">
     <p:bg>
@@ -14740,7 +15375,7 @@
 </p:sld>
 </file>
 
-<file path=ppt/slides/slide8.xml><?xml version="1.0" encoding="utf-8"?>
+<file path=ppt/slides/slide9.xml><?xml version="1.0" encoding="utf-8"?>
 <p:sld xmlns:a="http://schemas.openxmlformats.org/drawingml/2006/main" xmlns:r="http://schemas.openxmlformats.org/officeDocument/2006/relationships" xmlns:p="http://schemas.openxmlformats.org/presentationml/2006/main">
   <p:cSld name="Slide 8">
     <p:bg>
@@ -15251,641 +15886,6 @@
       <p:sp>
         <p:nvSpPr>
           <p:cNvPr id="12" name="Text 9"/>
-          <p:cNvSpPr/>
-          <p:nvPr/>
-        </p:nvSpPr>
-        <p:spPr>
-          <a:xfrm>
-            <a:off x="594360" y="6565392"/>
-            <a:ext cx="7315200" cy="182880"/>
-          </a:xfrm>
-          <a:prstGeom prst="rect">
-            <a:avLst/>
-          </a:prstGeom>
-          <a:noFill/>
-          <a:ln/>
-        </p:spPr>
-        <p:txBody>
-          <a:bodyPr wrap="square" lIns="0" tIns="0" rIns="0" bIns="0" rtlCol="0" anchor="ctr"/>
-          <a:lstStyle/>
-          <a:p>
-            <a:pPr marL="0" indent="0">
-              <a:buNone/>
-            </a:pPr>
-            <a:r>
-              <a:rPr lang="en-US" sz="770" dirty="0">
-                <a:solidFill>
-                  <a:srgbClr val="8B8275"/>
-                </a:solidFill>
-              </a:rPr>
-              <a:t>TutorBot · Entregable 3</a:t>
-            </a:r>
-            <a:endParaRPr lang="en-US" sz="770" dirty="0"/>
-          </a:p>
-        </p:txBody>
-      </p:sp>
-    </p:spTree>
-  </p:cSld>
-  <p:clrMapOvr>
-    <a:masterClrMapping/>
-  </p:clrMapOvr>
-</p:sld>
-</file>
-
-<file path=ppt/slides/slide9.xml><?xml version="1.0" encoding="utf-8"?>
-<p:sld xmlns:a="http://schemas.openxmlformats.org/drawingml/2006/main" xmlns:r="http://schemas.openxmlformats.org/officeDocument/2006/relationships" xmlns:p="http://schemas.openxmlformats.org/presentationml/2006/main">
-  <p:cSld name="Slide 9">
-    <p:bg>
-      <p:bgPr>
-        <a:solidFill>
-          <a:srgbClr val="F7F4EC"/>
-        </a:solidFill>
-        <a:effectLst/>
-      </p:bgPr>
-    </p:bg>
-    <p:spTree>
-      <p:nvGrpSpPr>
-        <p:cNvPr id="1" name=""/>
-        <p:cNvGrpSpPr/>
-        <p:nvPr/>
-      </p:nvGrpSpPr>
-      <p:grpSpPr>
-        <a:xfrm>
-          <a:off x="0" y="0"/>
-          <a:ext cx="0" cy="0"/>
-          <a:chOff x="0" y="0"/>
-          <a:chExt cx="0" cy="0"/>
-        </a:xfrm>
-      </p:grpSpPr>
-      <p:sp>
-        <p:nvSpPr>
-          <p:cNvPr id="2" name="Text 0"/>
-          <p:cNvSpPr/>
-          <p:nvPr/>
-        </p:nvSpPr>
-        <p:spPr>
-          <a:xfrm>
-            <a:off x="411480" y="210312"/>
-            <a:ext cx="6217920" cy="182880"/>
-          </a:xfrm>
-          <a:prstGeom prst="rect">
-            <a:avLst/>
-          </a:prstGeom>
-          <a:noFill/>
-          <a:ln/>
-        </p:spPr>
-        <p:txBody>
-          <a:bodyPr wrap="square" lIns="0" tIns="0" rIns="0" bIns="0" rtlCol="0" anchor="ctr"/>
-          <a:lstStyle/>
-          <a:p>
-            <a:pPr marL="0" indent="0">
-              <a:buNone/>
-            </a:pPr>
-            <a:r>
-              <a:rPr lang="en-US" sz="850" dirty="0">
-                <a:solidFill>
-                  <a:srgbClr val="5B6770"/>
-                </a:solidFill>
-              </a:rPr>
-              <a:t>Implementación y despliegue</a:t>
-            </a:r>
-            <a:endParaRPr lang="en-US" sz="850" dirty="0"/>
-          </a:p>
-        </p:txBody>
-      </p:sp>
-      <p:sp>
-        <p:nvSpPr>
-          <p:cNvPr id="3" name="Text 1"/>
-          <p:cNvSpPr/>
-          <p:nvPr/>
-        </p:nvSpPr>
-        <p:spPr>
-          <a:xfrm>
-            <a:off x="11155680" y="164592"/>
-            <a:ext cx="594360" cy="228600"/>
-          </a:xfrm>
-          <a:prstGeom prst="rect">
-            <a:avLst/>
-          </a:prstGeom>
-          <a:noFill/>
-          <a:ln/>
-        </p:spPr>
-        <p:txBody>
-          <a:bodyPr wrap="square" lIns="0" tIns="0" rIns="0" bIns="0" rtlCol="0" anchor="ctr"/>
-          <a:lstStyle/>
-          <a:p>
-            <a:pPr marL="0" indent="0" algn="r">
-              <a:buNone/>
-            </a:pPr>
-            <a:r>
-              <a:rPr lang="en-US" sz="900" dirty="0">
-                <a:solidFill>
-                  <a:srgbClr val="5B6770"/>
-                </a:solidFill>
-              </a:rPr>
-              <a:t>09</a:t>
-            </a:r>
-            <a:endParaRPr lang="en-US" sz="900" dirty="0"/>
-          </a:p>
-        </p:txBody>
-      </p:sp>
-      <p:sp>
-        <p:nvSpPr>
-          <p:cNvPr id="4" name="Shape 2"/>
-          <p:cNvSpPr/>
-          <p:nvPr/>
-        </p:nvSpPr>
-        <p:spPr>
-          <a:xfrm>
-            <a:off x="411480" y="475488"/>
-            <a:ext cx="11384280" cy="0"/>
-          </a:xfrm>
-          <a:prstGeom prst="line">
-            <a:avLst/>
-          </a:prstGeom>
-          <a:noFill/>
-          <a:ln w="8890">
-            <a:solidFill>
-              <a:srgbClr val="D6CAB4"/>
-            </a:solidFill>
-            <a:prstDash val="solid"/>
-          </a:ln>
-        </p:spPr>
-      </p:sp>
-      <p:sp>
-        <p:nvSpPr>
-          <p:cNvPr id="5" name="Text 3"/>
-          <p:cNvSpPr/>
-          <p:nvPr/>
-        </p:nvSpPr>
-        <p:spPr>
-          <a:xfrm>
-            <a:off x="594360" y="658368"/>
-            <a:ext cx="11155680" cy="502920"/>
-          </a:xfrm>
-          <a:prstGeom prst="rect">
-            <a:avLst/>
-          </a:prstGeom>
-          <a:noFill/>
-          <a:ln/>
-        </p:spPr>
-        <p:txBody>
-          <a:bodyPr wrap="square" rtlCol="0" anchor="ctr">
-            <a:normAutofit/>
-          </a:bodyPr>
-          <a:lstStyle/>
-          <a:p>
-            <a:pPr marL="0" indent="0">
-              <a:buNone/>
-            </a:pPr>
-            <a:r>
-              <a:rPr lang="en-US" sz="2700" b="1" dirty="0">
-                <a:solidFill>
-                  <a:srgbClr val="17202A"/>
-                </a:solidFill>
-                <a:latin typeface="Aptos Display" pitchFamily="34" charset="0"/>
-                <a:ea typeface="Aptos Display" pitchFamily="34" charset="-122"/>
-                <a:cs typeface="Aptos Display" pitchFamily="34" charset="-120"/>
-              </a:rPr>
-              <a:t>La aplicación está desplegada y operativa en Railway</a:t>
-            </a:r>
-            <a:endParaRPr lang="en-US" sz="2700" dirty="0"/>
-          </a:p>
-        </p:txBody>
-      </p:sp>
-      <p:sp>
-        <p:nvSpPr>
-          <p:cNvPr id="6" name="Text 4"/>
-          <p:cNvSpPr/>
-          <p:nvPr/>
-        </p:nvSpPr>
-        <p:spPr>
-          <a:xfrm>
-            <a:off x="594360" y="1298448"/>
-            <a:ext cx="5257800" cy="128016"/>
-          </a:xfrm>
-          <a:prstGeom prst="rect">
-            <a:avLst/>
-          </a:prstGeom>
-          <a:noFill/>
-          <a:ln/>
-        </p:spPr>
-        <p:txBody>
-          <a:bodyPr wrap="square" lIns="0" tIns="0" rIns="0" bIns="0" rtlCol="0" anchor="ctr">
-            <a:normAutofit/>
-          </a:bodyPr>
-          <a:lstStyle/>
-          <a:p>
-            <a:pPr marL="0" indent="0">
-              <a:buNone/>
-            </a:pPr>
-            <a:r>
-              <a:rPr lang="en-US" sz="980" dirty="0">
-                <a:solidFill>
-                  <a:srgbClr val="5B6770"/>
-                </a:solidFill>
-              </a:rPr>
-              <a:t>El runtime usa Docker, variables de entorno y una interfaz Gradio pública.</a:t>
-            </a:r>
-            <a:endParaRPr lang="en-US" sz="980" dirty="0"/>
-          </a:p>
-        </p:txBody>
-      </p:sp>
-      <p:pic>
-        <p:nvPicPr>
-          <p:cNvPr id="7" name="Image 0" descr="/mnt/data/7556199d-6e34-4b7b-b41c-1f2adcf3df76.png"/>
-          <p:cNvPicPr>
-            <a:picLocks noChangeAspect="1"/>
-          </p:cNvPicPr>
-          <p:nvPr/>
-        </p:nvPicPr>
-        <p:blipFill>
-          <a:blip r:embed="rId3"/>
-          <a:srcRect l="7082" r="7082"/>
-          <a:stretch/>
-        </p:blipFill>
-        <p:spPr>
-          <a:xfrm>
-            <a:off x="640080" y="1508760"/>
-            <a:ext cx="5303520" cy="2926080"/>
-          </a:xfrm>
-          <a:prstGeom prst="rect">
-            <a:avLst/>
-          </a:prstGeom>
-        </p:spPr>
-      </p:pic>
-      <p:pic>
-        <p:nvPicPr>
-          <p:cNvPr id="8" name="Image 1" descr="/mnt/data/2877a550-cce5-440f-b0cf-9295ab48f369.png"/>
-          <p:cNvPicPr>
-            <a:picLocks noChangeAspect="1"/>
-          </p:cNvPicPr>
-          <p:nvPr/>
-        </p:nvPicPr>
-        <p:blipFill>
-          <a:blip r:embed="rId4"/>
-          <a:srcRect t="18037" b="18037"/>
-          <a:stretch/>
-        </p:blipFill>
-        <p:spPr>
-          <a:xfrm>
-            <a:off x="640080" y="4480560"/>
-            <a:ext cx="5303520" cy="1572768"/>
-          </a:xfrm>
-          <a:prstGeom prst="rect">
-            <a:avLst/>
-          </a:prstGeom>
-        </p:spPr>
-      </p:pic>
-      <p:sp>
-        <p:nvSpPr>
-          <p:cNvPr id="9" name="Shape 5"/>
-          <p:cNvSpPr/>
-          <p:nvPr/>
-        </p:nvSpPr>
-        <p:spPr>
-          <a:xfrm>
-            <a:off x="6400800" y="1600200"/>
-            <a:ext cx="5166360" cy="2331720"/>
-          </a:xfrm>
-          <a:prstGeom prst="roundRect">
-            <a:avLst>
-              <a:gd name="adj" fmla="val 1961"/>
-            </a:avLst>
-          </a:prstGeom>
-          <a:solidFill>
-            <a:srgbClr val="111827"/>
-          </a:solidFill>
-          <a:ln w="7620">
-            <a:solidFill>
-              <a:srgbClr val="28313E"/>
-            </a:solidFill>
-            <a:prstDash val="solid"/>
-          </a:ln>
-        </p:spPr>
-      </p:sp>
-      <p:sp>
-        <p:nvSpPr>
-          <p:cNvPr id="10" name="Text 6"/>
-          <p:cNvSpPr/>
-          <p:nvPr/>
-        </p:nvSpPr>
-        <p:spPr>
-          <a:xfrm>
-            <a:off x="6510528" y="1691640"/>
-            <a:ext cx="4946904" cy="2148840"/>
-          </a:xfrm>
-          <a:prstGeom prst="rect">
-            <a:avLst/>
-          </a:prstGeom>
-          <a:noFill/>
-          <a:ln/>
-        </p:spPr>
-        <p:txBody>
-          <a:bodyPr wrap="square" lIns="0" tIns="0" rIns="0" bIns="0" rtlCol="0" anchor="ctr">
-            <a:normAutofit/>
-          </a:bodyPr>
-          <a:lstStyle/>
-          <a:p>
-            <a:pPr marL="0" indent="0">
-              <a:buNone/>
-            </a:pPr>
-            <a:r>
-              <a:rPr lang="en-US" sz="850" dirty="0">
-                <a:solidFill>
-                  <a:srgbClr val="E8EDF3"/>
-                </a:solidFill>
-                <a:latin typeface="Courier New" pitchFamily="34" charset="0"/>
-                <a:ea typeface="Courier New" pitchFamily="34" charset="-122"/>
-                <a:cs typeface="Courier New" pitchFamily="34" charset="-120"/>
-              </a:rPr>
-              <a:t>if __name__ == "__main__":</a:t>
-            </a:r>
-            <a:endParaRPr lang="en-US" sz="850" dirty="0"/>
-          </a:p>
-          <a:p>
-            <a:pPr marL="0" indent="0">
-              <a:buNone/>
-            </a:pPr>
-            <a:r>
-              <a:rPr lang="en-US" sz="850" dirty="0">
-                <a:solidFill>
-                  <a:srgbClr val="E8EDF3"/>
-                </a:solidFill>
-                <a:latin typeface="Courier New" pitchFamily="34" charset="0"/>
-                <a:ea typeface="Courier New" pitchFamily="34" charset="-122"/>
-                <a:cs typeface="Courier New" pitchFamily="34" charset="-120"/>
-              </a:rPr>
-              <a:t>    port = int(os.getenv("PORT", "7860"))</a:t>
-            </a:r>
-            <a:endParaRPr lang="en-US" sz="850" dirty="0"/>
-          </a:p>
-          <a:p>
-            <a:pPr marL="0" indent="0">
-              <a:buNone/>
-            </a:pPr>
-            <a:r>
-              <a:rPr lang="en-US" sz="850" dirty="0">
-                <a:solidFill>
-                  <a:srgbClr val="E8EDF3"/>
-                </a:solidFill>
-                <a:latin typeface="Courier New" pitchFamily="34" charset="0"/>
-                <a:ea typeface="Courier New" pitchFamily="34" charset="-122"/>
-                <a:cs typeface="Courier New" pitchFamily="34" charset="-120"/>
-              </a:rPr>
-              <a:t>    demo.queue()</a:t>
-            </a:r>
-            <a:endParaRPr lang="en-US" sz="850" dirty="0"/>
-          </a:p>
-          <a:p>
-            <a:pPr marL="0" indent="0">
-              <a:buNone/>
-            </a:pPr>
-            <a:r>
-              <a:rPr lang="en-US" sz="850" dirty="0">
-                <a:solidFill>
-                  <a:srgbClr val="E8EDF3"/>
-                </a:solidFill>
-                <a:latin typeface="Courier New" pitchFamily="34" charset="0"/>
-                <a:ea typeface="Courier New" pitchFamily="34" charset="-122"/>
-                <a:cs typeface="Courier New" pitchFamily="34" charset="-120"/>
-              </a:rPr>
-              <a:t>    demo.launch(</a:t>
-            </a:r>
-            <a:endParaRPr lang="en-US" sz="850" dirty="0"/>
-          </a:p>
-          <a:p>
-            <a:pPr marL="0" indent="0">
-              <a:buNone/>
-            </a:pPr>
-            <a:r>
-              <a:rPr lang="en-US" sz="850" dirty="0">
-                <a:solidFill>
-                  <a:srgbClr val="E8EDF3"/>
-                </a:solidFill>
-                <a:latin typeface="Courier New" pitchFamily="34" charset="0"/>
-                <a:ea typeface="Courier New" pitchFamily="34" charset="-122"/>
-                <a:cs typeface="Courier New" pitchFamily="34" charset="-120"/>
-              </a:rPr>
-              <a:t>        server_name="0.0.0.0",</a:t>
-            </a:r>
-            <a:endParaRPr lang="en-US" sz="850" dirty="0"/>
-          </a:p>
-          <a:p>
-            <a:pPr marL="0" indent="0">
-              <a:buNone/>
-            </a:pPr>
-            <a:r>
-              <a:rPr lang="en-US" sz="850" dirty="0">
-                <a:solidFill>
-                  <a:srgbClr val="E8EDF3"/>
-                </a:solidFill>
-                <a:latin typeface="Courier New" pitchFamily="34" charset="0"/>
-                <a:ea typeface="Courier New" pitchFamily="34" charset="-122"/>
-                <a:cs typeface="Courier New" pitchFamily="34" charset="-120"/>
-              </a:rPr>
-              <a:t>        server_port=port,</a:t>
-            </a:r>
-            <a:endParaRPr lang="en-US" sz="850" dirty="0"/>
-          </a:p>
-          <a:p>
-            <a:pPr marL="0" indent="0">
-              <a:buNone/>
-            </a:pPr>
-            <a:r>
-              <a:rPr lang="en-US" sz="850" dirty="0">
-                <a:solidFill>
-                  <a:srgbClr val="E8EDF3"/>
-                </a:solidFill>
-                <a:latin typeface="Courier New" pitchFamily="34" charset="0"/>
-                <a:ea typeface="Courier New" pitchFamily="34" charset="-122"/>
-                <a:cs typeface="Courier New" pitchFamily="34" charset="-120"/>
-              </a:rPr>
-              <a:t>        show_error=True</a:t>
-            </a:r>
-            <a:endParaRPr lang="en-US" sz="850" dirty="0"/>
-          </a:p>
-          <a:p>
-            <a:pPr marL="0" indent="0">
-              <a:buNone/>
-            </a:pPr>
-            <a:r>
-              <a:rPr lang="en-US" sz="850" dirty="0">
-                <a:solidFill>
-                  <a:srgbClr val="E8EDF3"/>
-                </a:solidFill>
-                <a:latin typeface="Courier New" pitchFamily="34" charset="0"/>
-                <a:ea typeface="Courier New" pitchFamily="34" charset="-122"/>
-                <a:cs typeface="Courier New" pitchFamily="34" charset="-120"/>
-              </a:rPr>
-              <a:t>    )</a:t>
-            </a:r>
-            <a:endParaRPr lang="en-US" sz="850" dirty="0"/>
-          </a:p>
-        </p:txBody>
-      </p:sp>
-      <p:sp>
-        <p:nvSpPr>
-          <p:cNvPr id="11" name="Shape 7"/>
-          <p:cNvSpPr/>
-          <p:nvPr/>
-        </p:nvSpPr>
-        <p:spPr>
-          <a:xfrm>
-            <a:off x="6400800" y="4206240"/>
-            <a:ext cx="5166360" cy="1554480"/>
-          </a:xfrm>
-          <a:prstGeom prst="roundRect">
-            <a:avLst>
-              <a:gd name="adj" fmla="val 2941"/>
-            </a:avLst>
-          </a:prstGeom>
-          <a:solidFill>
-            <a:srgbClr val="111827"/>
-          </a:solidFill>
-          <a:ln w="7620">
-            <a:solidFill>
-              <a:srgbClr val="28313E"/>
-            </a:solidFill>
-            <a:prstDash val="solid"/>
-          </a:ln>
-        </p:spPr>
-      </p:sp>
-      <p:sp>
-        <p:nvSpPr>
-          <p:cNvPr id="12" name="Text 8"/>
-          <p:cNvSpPr/>
-          <p:nvPr/>
-        </p:nvSpPr>
-        <p:spPr>
-          <a:xfrm>
-            <a:off x="6510528" y="4297680"/>
-            <a:ext cx="4946904" cy="1371600"/>
-          </a:xfrm>
-          <a:prstGeom prst="rect">
-            <a:avLst/>
-          </a:prstGeom>
-          <a:noFill/>
-          <a:ln/>
-        </p:spPr>
-        <p:txBody>
-          <a:bodyPr wrap="square" lIns="0" tIns="0" rIns="0" bIns="0" rtlCol="0" anchor="ctr">
-            <a:normAutofit/>
-          </a:bodyPr>
-          <a:lstStyle/>
-          <a:p>
-            <a:pPr marL="0" indent="0">
-              <a:buNone/>
-            </a:pPr>
-            <a:r>
-              <a:rPr lang="en-US" sz="940" dirty="0">
-                <a:solidFill>
-                  <a:srgbClr val="E8EDF3"/>
-                </a:solidFill>
-                <a:latin typeface="Courier New" pitchFamily="34" charset="0"/>
-                <a:ea typeface="Courier New" pitchFamily="34" charset="-122"/>
-                <a:cs typeface="Courier New" pitchFamily="34" charset="-120"/>
-              </a:rPr>
-              <a:t># railway.json</a:t>
-            </a:r>
-            <a:endParaRPr lang="en-US" sz="940" dirty="0"/>
-          </a:p>
-          <a:p>
-            <a:pPr marL="0" indent="0">
-              <a:buNone/>
-            </a:pPr>
-            <a:r>
-              <a:rPr lang="en-US" sz="940" dirty="0">
-                <a:solidFill>
-                  <a:srgbClr val="E8EDF3"/>
-                </a:solidFill>
-                <a:latin typeface="Courier New" pitchFamily="34" charset="0"/>
-                <a:ea typeface="Courier New" pitchFamily="34" charset="-122"/>
-                <a:cs typeface="Courier New" pitchFamily="34" charset="-120"/>
-              </a:rPr>
-              <a:t>{</a:t>
-            </a:r>
-            <a:endParaRPr lang="en-US" sz="940" dirty="0"/>
-          </a:p>
-          <a:p>
-            <a:pPr marL="0" indent="0">
-              <a:buNone/>
-            </a:pPr>
-            <a:r>
-              <a:rPr lang="en-US" sz="940" dirty="0">
-                <a:solidFill>
-                  <a:srgbClr val="E8EDF3"/>
-                </a:solidFill>
-                <a:latin typeface="Courier New" pitchFamily="34" charset="0"/>
-                <a:ea typeface="Courier New" pitchFamily="34" charset="-122"/>
-                <a:cs typeface="Courier New" pitchFamily="34" charset="-120"/>
-              </a:rPr>
-              <a:t>  "build": { "builder": "DOCKERFILE" }</a:t>
-            </a:r>
-            <a:endParaRPr lang="en-US" sz="940" dirty="0"/>
-          </a:p>
-          <a:p>
-            <a:pPr marL="0" indent="0">
-              <a:buNone/>
-            </a:pPr>
-            <a:r>
-              <a:rPr lang="en-US" sz="940" dirty="0">
-                <a:solidFill>
-                  <a:srgbClr val="E8EDF3"/>
-                </a:solidFill>
-                <a:latin typeface="Courier New" pitchFamily="34" charset="0"/>
-                <a:ea typeface="Courier New" pitchFamily="34" charset="-122"/>
-                <a:cs typeface="Courier New" pitchFamily="34" charset="-120"/>
-              </a:rPr>
-              <a:t>}</a:t>
-            </a:r>
-            <a:endParaRPr lang="en-US" sz="940" dirty="0"/>
-          </a:p>
-          <a:p>
-            <a:pPr marL="0" indent="0">
-              <a:buNone/>
-            </a:pPr>
-            <a:endParaRPr lang="en-US" sz="940" dirty="0"/>
-          </a:p>
-          <a:p>
-            <a:pPr marL="0" indent="0">
-              <a:buNone/>
-            </a:pPr>
-            <a:r>
-              <a:rPr lang="en-US" sz="940" dirty="0">
-                <a:solidFill>
-                  <a:srgbClr val="E8EDF3"/>
-                </a:solidFill>
-                <a:latin typeface="Courier New" pitchFamily="34" charset="0"/>
-                <a:ea typeface="Courier New" pitchFamily="34" charset="-122"/>
-                <a:cs typeface="Courier New" pitchFamily="34" charset="-120"/>
-              </a:rPr>
-              <a:t>GEMINI_API_KEY = Railway Variable</a:t>
-            </a:r>
-            <a:endParaRPr lang="en-US" sz="940" dirty="0"/>
-          </a:p>
-          <a:p>
-            <a:pPr marL="0" indent="0">
-              <a:buNone/>
-            </a:pPr>
-            <a:r>
-              <a:rPr lang="en-US" sz="940" dirty="0">
-                <a:solidFill>
-                  <a:srgbClr val="E8EDF3"/>
-                </a:solidFill>
-                <a:latin typeface="Courier New" pitchFamily="34" charset="0"/>
-                <a:ea typeface="Courier New" pitchFamily="34" charset="-122"/>
-                <a:cs typeface="Courier New" pitchFamily="34" charset="-120"/>
-              </a:rPr>
-              <a:t>HF_TOKEN = Railway Variable</a:t>
-            </a:r>
-            <a:endParaRPr lang="en-US" sz="940" dirty="0"/>
-          </a:p>
-        </p:txBody>
-      </p:sp>
-      <p:sp>
-        <p:nvSpPr>
-          <p:cNvPr id="13" name="Text 9"/>
           <p:cNvSpPr/>
           <p:nvPr/>
         </p:nvSpPr>
